--- a/courses/learn_floorplanning/module04-03-pin-assignment/slides.pptx
+++ b/courses/learn_floorplanning/module04-03-pin-assignment/slides.pptx
@@ -11,6 +11,10 @@
     <p:sldId id="259" r:id="rId11"/>
     <p:sldId id="260" r:id="rId12"/>
     <p:sldId id="261" r:id="rId13"/>
+    <p:sldId id="262" r:id="rId14"/>
+    <p:sldId id="263" r:id="rId15"/>
+    <p:sldId id="264" r:id="rId16"/>
+    <p:sldId id="265" r:id="rId17"/>
   </p:sldIdLst>
   <p:sldSz cx="12191695" cy="6858000" type="screen4x3"/>
   <p:notesSz cx="6858000" cy="9144000"/>
@@ -507,7 +511,83 @@
           <a:lstStyle/>
           <a:p>
             <a:r>
-              <a:t>Chips talk to the outside world through I/O pins on the outline edges—north, east, south, west. Pin assignment places those pins along edges and influences which modules should abut which sides. Floorplanning without pins ignores a major wirelength and packaging constraint.</a:t>
+              <a:t>Pins sit on outline edges. Golden assignment places P0 left, P1 bottom, P2 right, P3 top—four sides covered so pinsValid is true. An empty list is invalid.</a:t>
+            </a:r>
+          </a:p>
+          <a:p/>
+          <a:p>
+            <a:r>
+              <a:t>&lt;!-- algorithm-walkthrough --&gt;</a:t>
+            </a:r>
+          </a:p>
+        </p:txBody>
+      </p:sp>
+      <p:sp>
+        <p:nvSpPr>
+          <p:cNvPr id="4" name="Slide Number Placeholder 3"/>
+          <p:cNvSpPr>
+            <a:spLocks noGrp="1"/>
+          </p:cNvSpPr>
+          <p:nvPr>
+            <p:ph type="sldNum" idx="5" sz="quarter"/>
+          </p:nvPr>
+        </p:nvSpPr>
+        <p:spPr/>
+      </p:sp>
+    </p:spTree>
+  </p:cSld>
+  <p:clrMapOvr>
+    <a:masterClrMapping/>
+  </p:clrMapOvr>
+</p:notes>
+</file>
+
+<file path=ppt/notesSlides/notesSlide10.xml><?xml version="1.0" encoding="utf-8"?>
+<p:notes xmlns:a="http://schemas.openxmlformats.org/drawingml/2006/main" xmlns:p="http://schemas.openxmlformats.org/presentationml/2006/main" xmlns:r="http://schemas.openxmlformats.org/officeDocument/2006/relationships">
+  <p:cSld>
+    <p:spTree>
+      <p:nvGrpSpPr>
+        <p:cNvPr id="1" name=""/>
+        <p:cNvGrpSpPr/>
+        <p:nvPr/>
+      </p:nvGrpSpPr>
+      <p:grpSpPr>
+        <a:xfrm>
+          <a:off x="0" y="0"/>
+          <a:ext cx="0" cy="0"/>
+          <a:chOff x="0" y="0"/>
+          <a:chExt cx="0" cy="0"/>
+        </a:xfrm>
+      </p:grpSpPr>
+      <p:sp>
+        <p:nvSpPr>
+          <p:cNvPr id="2" name="Slide Image Placeholder 1"/>
+          <p:cNvSpPr>
+            <a:spLocks noGrp="1"/>
+          </p:cNvSpPr>
+          <p:nvPr>
+            <p:ph type="sldImg" idx="2"/>
+          </p:nvPr>
+        </p:nvSpPr>
+        <p:spPr/>
+      </p:sp>
+      <p:sp>
+        <p:nvSpPr>
+          <p:cNvPr id="3" name="Notes Placeholder 2"/>
+          <p:cNvSpPr>
+            <a:spLocks noGrp="1"/>
+          </p:cNvSpPr>
+          <p:nvPr>
+            <p:ph type="body" idx="3" sz="quarter"/>
+          </p:nvPr>
+        </p:nvSpPr>
+        <p:spPr/>
+        <p:txBody>
+          <a:bodyPr/>
+          <a:lstStyle/>
+          <a:p>
+            <a:r>
+              <a:t>Ship a valid four-side assignment. Offline compare is next; then the wrap points to learn_placement.</a:t>
             </a:r>
           </a:p>
         </p:txBody>
@@ -577,7 +657,7 @@
           <a:lstStyle/>
           <a:p>
             <a:r>
-              <a:t>Each pin gets an edge and a position along that edge. Modules that connect to a pin prefer shorter Manhattan stubs toward that side. You can score a packing with a simple pin-to-module wirelength proxy. Fixed outline still governs module legality; pins live on the boundary, not inside module interiors.</a:t>
+              <a:t>Start from the golden packing with an empty pin list. Pins will sit on outline edges—not inside modules—for I/O literacy.</a:t>
             </a:r>
           </a:p>
         </p:txBody>
@@ -647,7 +727,7 @@
           <a:lstStyle/>
           <a:p>
             <a:r>
-              <a:t>Open **pin-assignment**. Place a few pins on the four edges. Connect them to modules A–E with a toy netlist. Watch the wirelength proxy as you move pins or modules. Then implement edge assignment and scoring in Track A.</a:t>
+              <a:t>Golden pins place P0 on the left, P1 on the bottom, P2 on the right, and P3 on the top. Offsets stay inside each edge length.</a:t>
             </a:r>
           </a:p>
         </p:txBody>
@@ -717,7 +797,7 @@
           <a:lstStyle/>
           <a:p>
             <a:r>
-              <a:t>Add a pin list: id, side, offset. Assign sides for a handful of I/Os. Score sum of distances from module centers (or abutment points) to pin locations. Keep modules legal under the outline while you tweak assignments. Print the assignment table and score.</a:t>
+              <a:t>pinsValid requires every side to appear and offsets to lie on the edge. The golden set covers all four sides—valid returns true.</a:t>
             </a:r>
           </a:p>
         </p:txBody>
@@ -787,7 +867,7 @@
           <a:lstStyle/>
           <a:p>
             <a:r>
-              <a:t>Putting pins inside the outline instead of on the boundary breaks the model. Crowding every pin onto one edge creates congestion you won’t see if you only watch deadspace. Don’t forget that pin order on an edge can matter for packaging—even on a toy.</a:t>
+              <a:t>Clear the pins and validity fails: you no longer cover four sides. Assignment is a first-class constraint, not decoration.</a:t>
             </a:r>
           </a:p>
         </p:txBody>
@@ -857,7 +937,223 @@
           <a:lstStyle/>
           <a:p>
             <a:r>
-              <a:t>Assign boundary pins and report a wirelength proxy beside deadspace. Then continue to offline compare—and finally the wrap.</a:t>
+              <a:t>Boundary pins shape terminal propagation and routing demand. After floorplan shapes settle, pin assignment is the bridge to placement.</a:t>
+            </a:r>
+          </a:p>
+          <a:p/>
+          <a:p>
+            <a:r>
+              <a:t>&lt;!-- /algorithm-walkthrough --&gt;</a:t>
+            </a:r>
+          </a:p>
+        </p:txBody>
+      </p:sp>
+      <p:sp>
+        <p:nvSpPr>
+          <p:cNvPr id="4" name="Slide Number Placeholder 3"/>
+          <p:cNvSpPr>
+            <a:spLocks noGrp="1"/>
+          </p:cNvSpPr>
+          <p:nvPr>
+            <p:ph type="sldNum" idx="5" sz="quarter"/>
+          </p:nvPr>
+        </p:nvSpPr>
+        <p:spPr/>
+      </p:sp>
+    </p:spTree>
+  </p:cSld>
+  <p:clrMapOvr>
+    <a:masterClrMapping/>
+  </p:clrMapOvr>
+</p:notes>
+</file>
+
+<file path=ppt/notesSlides/notesSlide7.xml><?xml version="1.0" encoding="utf-8"?>
+<p:notes xmlns:a="http://schemas.openxmlformats.org/drawingml/2006/main" xmlns:p="http://schemas.openxmlformats.org/presentationml/2006/main" xmlns:r="http://schemas.openxmlformats.org/officeDocument/2006/relationships">
+  <p:cSld>
+    <p:spTree>
+      <p:nvGrpSpPr>
+        <p:cNvPr id="1" name=""/>
+        <p:cNvGrpSpPr/>
+        <p:nvPr/>
+      </p:nvGrpSpPr>
+      <p:grpSpPr>
+        <a:xfrm>
+          <a:off x="0" y="0"/>
+          <a:ext cx="0" cy="0"/>
+          <a:chOff x="0" y="0"/>
+          <a:chExt cx="0" cy="0"/>
+        </a:xfrm>
+      </p:grpSpPr>
+      <p:sp>
+        <p:nvSpPr>
+          <p:cNvPr id="2" name="Slide Image Placeholder 1"/>
+          <p:cNvSpPr>
+            <a:spLocks noGrp="1"/>
+          </p:cNvSpPr>
+          <p:nvPr>
+            <p:ph type="sldImg" idx="2"/>
+          </p:nvPr>
+        </p:nvSpPr>
+        <p:spPr/>
+      </p:sp>
+      <p:sp>
+        <p:nvSpPr>
+          <p:cNvPr id="3" name="Notes Placeholder 2"/>
+          <p:cNvSpPr>
+            <a:spLocks noGrp="1"/>
+          </p:cNvSpPr>
+          <p:nvPr>
+            <p:ph type="body" idx="3" sz="quarter"/>
+          </p:nvPr>
+        </p:nvSpPr>
+        <p:spPr/>
+        <p:txBody>
+          <a:bodyPr/>
+          <a:lstStyle/>
+          <a:p>
+            <a:r>
+              <a:t>Open pin-assignment. Assign golden pins, confirm four sides and valid true. Clear pins and watch validity fail.</a:t>
+            </a:r>
+          </a:p>
+        </p:txBody>
+      </p:sp>
+      <p:sp>
+        <p:nvSpPr>
+          <p:cNvPr id="4" name="Slide Number Placeholder 3"/>
+          <p:cNvSpPr>
+            <a:spLocks noGrp="1"/>
+          </p:cNvSpPr>
+          <p:nvPr>
+            <p:ph type="sldNum" idx="5" sz="quarter"/>
+          </p:nvPr>
+        </p:nvSpPr>
+        <p:spPr/>
+      </p:sp>
+    </p:spTree>
+  </p:cSld>
+  <p:clrMapOvr>
+    <a:masterClrMapping/>
+  </p:clrMapOvr>
+</p:notes>
+</file>
+
+<file path=ppt/notesSlides/notesSlide8.xml><?xml version="1.0" encoding="utf-8"?>
+<p:notes xmlns:a="http://schemas.openxmlformats.org/drawingml/2006/main" xmlns:p="http://schemas.openxmlformats.org/presentationml/2006/main" xmlns:r="http://schemas.openxmlformats.org/officeDocument/2006/relationships">
+  <p:cSld>
+    <p:spTree>
+      <p:nvGrpSpPr>
+        <p:cNvPr id="1" name=""/>
+        <p:cNvGrpSpPr/>
+        <p:nvPr/>
+      </p:nvGrpSpPr>
+      <p:grpSpPr>
+        <a:xfrm>
+          <a:off x="0" y="0"/>
+          <a:ext cx="0" cy="0"/>
+          <a:chOff x="0" y="0"/>
+          <a:chExt cx="0" cy="0"/>
+        </a:xfrm>
+      </p:grpSpPr>
+      <p:sp>
+        <p:nvSpPr>
+          <p:cNvPr id="2" name="Slide Image Placeholder 1"/>
+          <p:cNvSpPr>
+            <a:spLocks noGrp="1"/>
+          </p:cNvSpPr>
+          <p:nvPr>
+            <p:ph type="sldImg" idx="2"/>
+          </p:nvPr>
+        </p:nvSpPr>
+        <p:spPr/>
+      </p:sp>
+      <p:sp>
+        <p:nvSpPr>
+          <p:cNvPr id="3" name="Notes Placeholder 2"/>
+          <p:cNvSpPr>
+            <a:spLocks noGrp="1"/>
+          </p:cNvSpPr>
+          <p:nvPr>
+            <p:ph type="body" idx="3" sz="quarter"/>
+          </p:nvPr>
+        </p:nvSpPr>
+        <p:spPr/>
+        <p:txBody>
+          <a:bodyPr/>
+          <a:lstStyle/>
+          <a:p>
+            <a:r>
+              <a:t>Implement pinsValid requiring all four sides and in-range offsets. Assert golden pins pass and the empty list fails.</a:t>
+            </a:r>
+          </a:p>
+        </p:txBody>
+      </p:sp>
+      <p:sp>
+        <p:nvSpPr>
+          <p:cNvPr id="4" name="Slide Number Placeholder 3"/>
+          <p:cNvSpPr>
+            <a:spLocks noGrp="1"/>
+          </p:cNvSpPr>
+          <p:nvPr>
+            <p:ph type="sldNum" idx="5" sz="quarter"/>
+          </p:nvPr>
+        </p:nvSpPr>
+        <p:spPr/>
+      </p:sp>
+    </p:spTree>
+  </p:cSld>
+  <p:clrMapOvr>
+    <a:masterClrMapping/>
+  </p:clrMapOvr>
+</p:notes>
+</file>
+
+<file path=ppt/notesSlides/notesSlide9.xml><?xml version="1.0" encoding="utf-8"?>
+<p:notes xmlns:a="http://schemas.openxmlformats.org/drawingml/2006/main" xmlns:p="http://schemas.openxmlformats.org/presentationml/2006/main" xmlns:r="http://schemas.openxmlformats.org/officeDocument/2006/relationships">
+  <p:cSld>
+    <p:spTree>
+      <p:nvGrpSpPr>
+        <p:cNvPr id="1" name=""/>
+        <p:cNvGrpSpPr/>
+        <p:nvPr/>
+      </p:nvGrpSpPr>
+      <p:grpSpPr>
+        <a:xfrm>
+          <a:off x="0" y="0"/>
+          <a:ext cx="0" cy="0"/>
+          <a:chOff x="0" y="0"/>
+          <a:chExt cx="0" cy="0"/>
+        </a:xfrm>
+      </p:grpSpPr>
+      <p:sp>
+        <p:nvSpPr>
+          <p:cNvPr id="2" name="Slide Image Placeholder 1"/>
+          <p:cNvSpPr>
+            <a:spLocks noGrp="1"/>
+          </p:cNvSpPr>
+          <p:nvPr>
+            <p:ph type="sldImg" idx="2"/>
+          </p:nvPr>
+        </p:nvSpPr>
+        <p:spPr/>
+      </p:sp>
+      <p:sp>
+        <p:nvSpPr>
+          <p:cNvPr id="3" name="Notes Placeholder 2"/>
+          <p:cNvSpPr>
+            <a:spLocks noGrp="1"/>
+          </p:cNvSpPr>
+          <p:nvPr>
+            <p:ph type="body" idx="3" sz="quarter"/>
+          </p:nvPr>
+        </p:nvSpPr>
+        <p:spPr/>
+        <p:txBody>
+          <a:bodyPr/>
+          <a:lstStyle/>
+          <a:p>
+            <a:r>
+              <a:t>Putting pins inside modules; offsets past edge length; claiming validity with only two sides covered.</a:t>
             </a:r>
           </a:p>
         </p:txBody>
@@ -3900,7 +4196,7 @@
                 </a:solidFill>
                 <a:latin typeface="Calibri"/>
               </a:rPr>
-              <a:t>Boundary pins</a:t>
+              <a:t>Boundary pin / I/O assignment</a:t>
             </a:r>
           </a:p>
           <a:p>
@@ -3919,7 +4215,7 @@
                 </a:solidFill>
                 <a:latin typeface="Calibri"/>
               </a:rPr>
-              <a:t>Chips talk to the outside world through I/O pins on the outline edges, north, east, south, west</a:t>
+              <a:t>Pins sit on outline edges</a:t>
             </a:r>
           </a:p>
         </p:txBody>
@@ -3927,6 +4223,169 @@
       <p:sp>
         <p:nvSpPr>
           <p:cNvPr id="3" name="TextBox 2"/>
+          <p:cNvSpPr txBox="1"/>
+          <p:nvPr/>
+        </p:nvSpPr>
+        <p:spPr>
+          <a:xfrm>
+            <a:off x="548640" y="6355080"/>
+            <a:ext cx="11064240" cy="320040"/>
+          </a:xfrm>
+          <a:prstGeom prst="rect">
+            <a:avLst/>
+          </a:prstGeom>
+          <a:noFill/>
+        </p:spPr>
+        <p:txBody>
+          <a:bodyPr wrap="square">
+            <a:noAutofit/>
+          </a:bodyPr>
+          <a:lstStyle/>
+          <a:p>
+            <a:pPr algn="r">
+              <a:lnSpc>
+                <a:spcPts val="2200"/>
+              </a:lnSpc>
+              <a:defRPr sz="1000" b="0">
+                <a:solidFill>
+                  <a:srgbClr val="666666"/>
+                </a:solidFill>
+                <a:latin typeface="Calibri"/>
+              </a:defRPr>
+            </a:pPr>
+            <a:r>
+              <a:t>learn_floorplanning — 03 pin assignment</a:t>
+            </a:r>
+          </a:p>
+        </p:txBody>
+      </p:sp>
+    </p:spTree>
+  </p:cSld>
+  <p:clrMapOvr>
+    <a:masterClrMapping/>
+  </p:clrMapOvr>
+</p:sld>
+</file>
+
+<file path=ppt/slides/slide10.xml><?xml version="1.0" encoding="utf-8"?>
+<p:sld xmlns:a="http://schemas.openxmlformats.org/drawingml/2006/main" xmlns:p="http://schemas.openxmlformats.org/presentationml/2006/main" xmlns:r="http://schemas.openxmlformats.org/officeDocument/2006/relationships">
+  <p:cSld>
+    <p:spTree>
+      <p:nvGrpSpPr>
+        <p:cNvPr id="1" name=""/>
+        <p:cNvGrpSpPr/>
+        <p:nvPr/>
+      </p:nvGrpSpPr>
+      <p:grpSpPr/>
+      <p:sp>
+        <p:nvSpPr>
+          <p:cNvPr id="2" name="TextBox 1"/>
+          <p:cNvSpPr txBox="1"/>
+          <p:nvPr/>
+        </p:nvSpPr>
+        <p:spPr>
+          <a:xfrm>
+            <a:off x="548640" y="411480"/>
+            <a:ext cx="11064240" cy="777240"/>
+          </a:xfrm>
+          <a:prstGeom prst="rect">
+            <a:avLst/>
+          </a:prstGeom>
+          <a:noFill/>
+        </p:spPr>
+        <p:txBody>
+          <a:bodyPr wrap="square">
+            <a:noAutofit/>
+          </a:bodyPr>
+          <a:lstStyle/>
+          <a:p>
+            <a:pPr>
+              <a:lnSpc>
+                <a:spcPts val="2200"/>
+              </a:lnSpc>
+            </a:pPr>
+            <a:r>
+              <a:rPr sz="2800" b="1">
+                <a:solidFill>
+                  <a:srgbClr val="1A1A2E"/>
+                </a:solidFill>
+                <a:latin typeface="Calibri"/>
+              </a:rPr>
+              <a:t>Your turn</a:t>
+            </a:r>
+          </a:p>
+        </p:txBody>
+      </p:sp>
+      <p:sp>
+        <p:nvSpPr>
+          <p:cNvPr id="3" name="TextBox 2"/>
+          <p:cNvSpPr txBox="1"/>
+          <p:nvPr/>
+        </p:nvSpPr>
+        <p:spPr>
+          <a:xfrm>
+            <a:off x="548640" y="1234440"/>
+            <a:ext cx="11064240" cy="4937760"/>
+          </a:xfrm>
+          <a:prstGeom prst="rect">
+            <a:avLst/>
+          </a:prstGeom>
+          <a:noFill/>
+        </p:spPr>
+        <p:txBody>
+          <a:bodyPr wrap="square">
+            <a:noAutofit/>
+          </a:bodyPr>
+          <a:lstStyle/>
+          <a:p>
+            <a:pPr lvl="0" marL="457200" indent="-228600">
+              <a:buFont typeface="Calibri"/>
+              <a:spcAft>
+                <a:spcPts val="1000"/>
+              </a:spcAft>
+              <a:buSzPct val="100000"/>
+              <a:buChar char="•"/>
+              <a:lnSpc>
+                <a:spcPts val="2200"/>
+              </a:lnSpc>
+            </a:pPr>
+            <a:r>
+              <a:rPr sz="2000" b="0">
+                <a:solidFill>
+                  <a:srgbClr val="333333"/>
+                </a:solidFill>
+                <a:latin typeface="Calibri"/>
+              </a:rPr>
+              <a:t>Ship a valid four-side assignment</a:t>
+            </a:r>
+          </a:p>
+          <a:p>
+            <a:pPr lvl="0" marL="457200" indent="-228600">
+              <a:buFont typeface="Calibri"/>
+              <a:spcAft>
+                <a:spcPts val="1000"/>
+              </a:spcAft>
+              <a:buSzPct val="100000"/>
+              <a:buChar char="•"/>
+              <a:lnSpc>
+                <a:spcPts val="2200"/>
+              </a:lnSpc>
+            </a:pPr>
+            <a:r>
+              <a:rPr sz="2000" b="0">
+                <a:solidFill>
+                  <a:srgbClr val="333333"/>
+                </a:solidFill>
+                <a:latin typeface="Calibri"/>
+              </a:rPr>
+              <a:t>Offline compare is next; then the wrap points to learn_placement</a:t>
+            </a:r>
+          </a:p>
+        </p:txBody>
+      </p:sp>
+      <p:sp>
+        <p:nvSpPr>
+          <p:cNvPr id="4" name="TextBox 3"/>
           <p:cNvSpPr txBox="1"/>
           <p:nvPr/>
         </p:nvSpPr>
@@ -4015,21 +4474,45 @@
                 </a:solidFill>
                 <a:latin typeface="Calibri"/>
               </a:rPr>
-              <a:t>The idea</a:t>
-            </a:r>
-          </a:p>
-        </p:txBody>
-      </p:sp>
-      <p:sp>
-        <p:nvSpPr>
-          <p:cNvPr id="3" name="TextBox 2"/>
+              <a:t>Packing without pins</a:t>
+            </a:r>
+          </a:p>
+        </p:txBody>
+      </p:sp>
+      <p:pic>
+        <p:nvPicPr>
+          <p:cNvPr id="3" name="Picture 2" descr="01-no-pins.png"/>
+          <p:cNvPicPr>
+            <a:picLocks noChangeAspect="1"/>
+          </p:cNvPicPr>
+          <p:nvPr/>
+        </p:nvPicPr>
+        <p:blipFill>
+          <a:blip r:embed="rId2"/>
+          <a:stretch>
+            <a:fillRect/>
+          </a:stretch>
+        </p:blipFill>
+        <p:spPr>
+          <a:xfrm>
+            <a:off x="548640" y="1143000"/>
+            <a:ext cx="9424736" cy="4572000"/>
+          </a:xfrm>
+          <a:prstGeom prst="rect">
+            <a:avLst/>
+          </a:prstGeom>
+        </p:spPr>
+      </p:pic>
+      <p:sp>
+        <p:nvSpPr>
+          <p:cNvPr id="4" name="TextBox 3"/>
           <p:cNvSpPr txBox="1"/>
           <p:nvPr/>
         </p:nvSpPr>
         <p:spPr>
           <a:xfrm>
-            <a:off x="548640" y="1234440"/>
-            <a:ext cx="11064240" cy="4937760"/>
+            <a:off x="548640" y="5897880"/>
+            <a:ext cx="11064240" cy="411480"/>
           </a:xfrm>
           <a:prstGeom prst="rect">
             <a:avLst/>
@@ -4042,98 +4525,26 @@
           </a:bodyPr>
           <a:lstStyle/>
           <a:p>
-            <a:pPr lvl="0" marL="457200" indent="-228600">
-              <a:buFont typeface="Calibri"/>
-              <a:spcAft>
-                <a:spcPts val="1000"/>
-              </a:spcAft>
-              <a:buSzPct val="100000"/>
-              <a:buChar char="•"/>
+            <a:pPr>
               <a:lnSpc>
                 <a:spcPts val="2200"/>
               </a:lnSpc>
             </a:pPr>
             <a:r>
-              <a:rPr sz="2000" b="0">
+              <a:rPr sz="1200" b="0">
                 <a:solidFill>
                   <a:srgbClr val="333333"/>
                 </a:solidFill>
                 <a:latin typeface="Calibri"/>
               </a:rPr>
-              <a:t>Each pin gets an edge and a position along that edge</a:t>
-            </a:r>
-          </a:p>
-          <a:p>
-            <a:pPr lvl="0" marL="457200" indent="-228600">
-              <a:buFont typeface="Calibri"/>
-              <a:spcAft>
-                <a:spcPts val="1000"/>
-              </a:spcAft>
-              <a:buSzPct val="100000"/>
-              <a:buChar char="•"/>
-              <a:lnSpc>
-                <a:spcPts val="2200"/>
-              </a:lnSpc>
-            </a:pPr>
-            <a:r>
-              <a:rPr sz="2000" b="0">
-                <a:solidFill>
-                  <a:srgbClr val="333333"/>
-                </a:solidFill>
-                <a:latin typeface="Calibri"/>
-              </a:rPr>
-              <a:t>Modules that connect to a pin prefer shorter Manhattan stubs toward that side</a:t>
-            </a:r>
-          </a:p>
-          <a:p>
-            <a:pPr lvl="0" marL="457200" indent="-228600">
-              <a:buFont typeface="Calibri"/>
-              <a:spcAft>
-                <a:spcPts val="1000"/>
-              </a:spcAft>
-              <a:buSzPct val="100000"/>
-              <a:buChar char="•"/>
-              <a:lnSpc>
-                <a:spcPts val="2200"/>
-              </a:lnSpc>
-            </a:pPr>
-            <a:r>
-              <a:rPr sz="2000" b="0">
-                <a:solidFill>
-                  <a:srgbClr val="333333"/>
-                </a:solidFill>
-                <a:latin typeface="Calibri"/>
-              </a:rPr>
-              <a:t>You can score a packing with a simple pin-to-module wirelength proxy</a:t>
-            </a:r>
-          </a:p>
-          <a:p>
-            <a:pPr lvl="0" marL="457200" indent="-228600">
-              <a:buFont typeface="Calibri"/>
-              <a:spcAft>
-                <a:spcPts val="1000"/>
-              </a:spcAft>
-              <a:buSzPct val="100000"/>
-              <a:buChar char="•"/>
-              <a:lnSpc>
-                <a:spcPts val="2200"/>
-              </a:lnSpc>
-            </a:pPr>
-            <a:r>
-              <a:rPr sz="2000" b="0">
-                <a:solidFill>
-                  <a:srgbClr val="333333"/>
-                </a:solidFill>
-                <a:latin typeface="Calibri"/>
-              </a:rPr>
-              <a:t>Fixed outline still governs module legality</a:t>
-            </a:r>
-          </a:p>
-        </p:txBody>
-      </p:sp>
-      <p:sp>
-        <p:nvSpPr>
-          <p:cNvPr id="4" name="TextBox 3"/>
+              <a:t>Packing without pins</a:t>
+            </a:r>
+          </a:p>
+        </p:txBody>
+      </p:sp>
+      <p:sp>
+        <p:nvSpPr>
+          <p:cNvPr id="5" name="TextBox 4"/>
           <p:cNvSpPr txBox="1"/>
           <p:nvPr/>
         </p:nvSpPr>
@@ -4222,21 +4633,45 @@
                 </a:solidFill>
                 <a:latin typeface="Calibri"/>
               </a:rPr>
-              <a:t>Browser lab track</a:t>
-            </a:r>
-          </a:p>
-        </p:txBody>
-      </p:sp>
-      <p:sp>
-        <p:nvSpPr>
-          <p:cNvPr id="3" name="TextBox 2"/>
+              <a:t>Assign one pin per side</a:t>
+            </a:r>
+          </a:p>
+        </p:txBody>
+      </p:sp>
+      <p:pic>
+        <p:nvPicPr>
+          <p:cNvPr id="3" name="Picture 2" descr="02-assign.png"/>
+          <p:cNvPicPr>
+            <a:picLocks noChangeAspect="1"/>
+          </p:cNvPicPr>
+          <p:nvPr/>
+        </p:nvPicPr>
+        <p:blipFill>
+          <a:blip r:embed="rId2"/>
+          <a:stretch>
+            <a:fillRect/>
+          </a:stretch>
+        </p:blipFill>
+        <p:spPr>
+          <a:xfrm>
+            <a:off x="548640" y="1143000"/>
+            <a:ext cx="9424736" cy="4572000"/>
+          </a:xfrm>
+          <a:prstGeom prst="rect">
+            <a:avLst/>
+          </a:prstGeom>
+        </p:spPr>
+      </p:pic>
+      <p:sp>
+        <p:nvSpPr>
+          <p:cNvPr id="4" name="TextBox 3"/>
           <p:cNvSpPr txBox="1"/>
           <p:nvPr/>
         </p:nvSpPr>
         <p:spPr>
           <a:xfrm>
-            <a:off x="548640" y="1234440"/>
-            <a:ext cx="11064240" cy="4937760"/>
+            <a:off x="548640" y="5897880"/>
+            <a:ext cx="11064240" cy="411480"/>
           </a:xfrm>
           <a:prstGeom prst="rect">
             <a:avLst/>
@@ -4249,129 +4684,26 @@
           </a:bodyPr>
           <a:lstStyle/>
           <a:p>
-            <a:pPr lvl="0" marL="457200" indent="-228600">
-              <a:buFont typeface="Calibri"/>
-              <a:spcAft>
-                <a:spcPts val="1000"/>
-              </a:spcAft>
-              <a:buSzPct val="100000"/>
-              <a:buChar char="•"/>
+            <a:pPr>
               <a:lnSpc>
                 <a:spcPts val="2200"/>
               </a:lnSpc>
             </a:pPr>
             <a:r>
-              <a:rPr sz="2000" b="0">
+              <a:rPr sz="1200" b="0">
                 <a:solidFill>
                   <a:srgbClr val="333333"/>
                 </a:solidFill>
                 <a:latin typeface="Calibri"/>
               </a:rPr>
-              <a:t>Open </a:t>
-            </a:r>
-            <a:r>
-              <a:rPr sz="2000" b="1">
-                <a:solidFill>
-                  <a:srgbClr val="333333"/>
-                </a:solidFill>
-                <a:latin typeface="Calibri"/>
-              </a:rPr>
-              <a:t>pin-assignment</a:t>
-            </a:r>
-          </a:p>
-          <a:p>
-            <a:pPr lvl="0" marL="457200" indent="-228600">
-              <a:buFont typeface="Calibri"/>
-              <a:spcAft>
-                <a:spcPts val="1000"/>
-              </a:spcAft>
-              <a:buSzPct val="100000"/>
-              <a:buChar char="•"/>
-              <a:lnSpc>
-                <a:spcPts val="2200"/>
-              </a:lnSpc>
-            </a:pPr>
-            <a:r>
-              <a:rPr sz="2000" b="0">
-                <a:solidFill>
-                  <a:srgbClr val="333333"/>
-                </a:solidFill>
-                <a:latin typeface="Calibri"/>
-              </a:rPr>
-              <a:t>Place a few pins on the four edges</a:t>
-            </a:r>
-          </a:p>
-          <a:p>
-            <a:pPr lvl="0" marL="457200" indent="-228600">
-              <a:buFont typeface="Calibri"/>
-              <a:spcAft>
-                <a:spcPts val="1000"/>
-              </a:spcAft>
-              <a:buSzPct val="100000"/>
-              <a:buChar char="•"/>
-              <a:lnSpc>
-                <a:spcPts val="2200"/>
-              </a:lnSpc>
-            </a:pPr>
-            <a:r>
-              <a:rPr sz="2000" b="0">
-                <a:solidFill>
-                  <a:srgbClr val="333333"/>
-                </a:solidFill>
-                <a:latin typeface="Calibri"/>
-              </a:rPr>
-              <a:t>Connect them to modules A–E with a toy netlist</a:t>
-            </a:r>
-          </a:p>
-          <a:p>
-            <a:pPr lvl="0" marL="457200" indent="-228600">
-              <a:buFont typeface="Calibri"/>
-              <a:spcAft>
-                <a:spcPts val="1000"/>
-              </a:spcAft>
-              <a:buSzPct val="100000"/>
-              <a:buChar char="•"/>
-              <a:lnSpc>
-                <a:spcPts val="2200"/>
-              </a:lnSpc>
-            </a:pPr>
-            <a:r>
-              <a:rPr sz="2000" b="0">
-                <a:solidFill>
-                  <a:srgbClr val="333333"/>
-                </a:solidFill>
-                <a:latin typeface="Calibri"/>
-              </a:rPr>
-              <a:t>Watch the wirelength proxy as you move pins or modules</a:t>
-            </a:r>
-          </a:p>
-          <a:p>
-            <a:pPr lvl="0" marL="457200" indent="-228600">
-              <a:buFont typeface="Calibri"/>
-              <a:spcAft>
-                <a:spcPts val="1000"/>
-              </a:spcAft>
-              <a:buSzPct val="100000"/>
-              <a:buChar char="•"/>
-              <a:lnSpc>
-                <a:spcPts val="2200"/>
-              </a:lnSpc>
-            </a:pPr>
-            <a:r>
-              <a:rPr sz="2000" b="0">
-                <a:solidFill>
-                  <a:srgbClr val="333333"/>
-                </a:solidFill>
-                <a:latin typeface="Calibri"/>
-              </a:rPr>
-              <a:t>Then implement edge assignment and scoring in Track A</a:t>
-            </a:r>
-          </a:p>
-        </p:txBody>
-      </p:sp>
-      <p:sp>
-        <p:nvSpPr>
-          <p:cNvPr id="4" name="TextBox 3"/>
+              <a:t>Assign one pin per side</a:t>
+            </a:r>
+          </a:p>
+        </p:txBody>
+      </p:sp>
+      <p:sp>
+        <p:nvSpPr>
+          <p:cNvPr id="5" name="TextBox 4"/>
           <p:cNvSpPr txBox="1"/>
           <p:nvPr/>
         </p:nvSpPr>
@@ -4460,21 +4792,45 @@
                 </a:solidFill>
                 <a:latin typeface="Calibri"/>
               </a:rPr>
-              <a:t>Implement track</a:t>
-            </a:r>
-          </a:p>
-        </p:txBody>
-      </p:sp>
-      <p:sp>
-        <p:nvSpPr>
-          <p:cNvPr id="3" name="TextBox 2"/>
+              <a:t>Coverage makes pinsValid true</a:t>
+            </a:r>
+          </a:p>
+        </p:txBody>
+      </p:sp>
+      <p:pic>
+        <p:nvPicPr>
+          <p:cNvPr id="3" name="Picture 2" descr="03-valid.png"/>
+          <p:cNvPicPr>
+            <a:picLocks noChangeAspect="1"/>
+          </p:cNvPicPr>
+          <p:nvPr/>
+        </p:nvPicPr>
+        <p:blipFill>
+          <a:blip r:embed="rId2"/>
+          <a:stretch>
+            <a:fillRect/>
+          </a:stretch>
+        </p:blipFill>
+        <p:spPr>
+          <a:xfrm>
+            <a:off x="548640" y="1143000"/>
+            <a:ext cx="9424736" cy="4572000"/>
+          </a:xfrm>
+          <a:prstGeom prst="rect">
+            <a:avLst/>
+          </a:prstGeom>
+        </p:spPr>
+      </p:pic>
+      <p:sp>
+        <p:nvSpPr>
+          <p:cNvPr id="4" name="TextBox 3"/>
           <p:cNvSpPr txBox="1"/>
           <p:nvPr/>
         </p:nvSpPr>
         <p:spPr>
           <a:xfrm>
-            <a:off x="548640" y="1234440"/>
-            <a:ext cx="11064240" cy="4937760"/>
+            <a:off x="548640" y="5897880"/>
+            <a:ext cx="11064240" cy="411480"/>
           </a:xfrm>
           <a:prstGeom prst="rect">
             <a:avLst/>
@@ -4487,120 +4843,26 @@
           </a:bodyPr>
           <a:lstStyle/>
           <a:p>
-            <a:pPr lvl="0" marL="457200" indent="-228600">
-              <a:buFont typeface="Calibri"/>
-              <a:spcAft>
-                <a:spcPts val="1000"/>
-              </a:spcAft>
-              <a:buSzPct val="100000"/>
-              <a:buChar char="•"/>
+            <a:pPr>
               <a:lnSpc>
                 <a:spcPts val="2200"/>
               </a:lnSpc>
             </a:pPr>
             <a:r>
-              <a:rPr sz="2000" b="0">
+              <a:rPr sz="1200" b="0">
                 <a:solidFill>
                   <a:srgbClr val="333333"/>
                 </a:solidFill>
                 <a:latin typeface="Calibri"/>
               </a:rPr>
-              <a:t>Add a pin list: id, side, offset</a:t>
-            </a:r>
-          </a:p>
-          <a:p>
-            <a:pPr lvl="0" marL="457200" indent="-228600">
-              <a:buFont typeface="Calibri"/>
-              <a:spcAft>
-                <a:spcPts val="1000"/>
-              </a:spcAft>
-              <a:buSzPct val="100000"/>
-              <a:buChar char="•"/>
-              <a:lnSpc>
-                <a:spcPts val="2200"/>
-              </a:lnSpc>
-            </a:pPr>
-            <a:r>
-              <a:rPr sz="2000" b="0">
-                <a:solidFill>
-                  <a:srgbClr val="333333"/>
-                </a:solidFill>
-                <a:latin typeface="Calibri"/>
-              </a:rPr>
-              <a:t>Assign sides for a handful of I/Os</a:t>
-            </a:r>
-          </a:p>
-          <a:p>
-            <a:pPr lvl="0" marL="457200" indent="-228600">
-              <a:buFont typeface="Calibri"/>
-              <a:spcAft>
-                <a:spcPts val="1000"/>
-              </a:spcAft>
-              <a:buSzPct val="100000"/>
-              <a:buChar char="•"/>
-              <a:lnSpc>
-                <a:spcPts val="2200"/>
-              </a:lnSpc>
-            </a:pPr>
-            <a:r>
-              <a:rPr sz="2000" b="0">
-                <a:solidFill>
-                  <a:srgbClr val="333333"/>
-                </a:solidFill>
-                <a:latin typeface="Calibri"/>
-              </a:rPr>
-              <a:t>Score sum of distances from module centers (or abutment points) to pin locations</a:t>
-            </a:r>
-          </a:p>
-          <a:p>
-            <a:pPr lvl="0" marL="457200" indent="-228600">
-              <a:buFont typeface="Calibri"/>
-              <a:spcAft>
-                <a:spcPts val="1000"/>
-              </a:spcAft>
-              <a:buSzPct val="100000"/>
-              <a:buChar char="•"/>
-              <a:lnSpc>
-                <a:spcPts val="2200"/>
-              </a:lnSpc>
-            </a:pPr>
-            <a:r>
-              <a:rPr sz="2000" b="0">
-                <a:solidFill>
-                  <a:srgbClr val="333333"/>
-                </a:solidFill>
-                <a:latin typeface="Calibri"/>
-              </a:rPr>
-              <a:t>Keep modules legal under the outline while you tweak assignments</a:t>
-            </a:r>
-          </a:p>
-          <a:p>
-            <a:pPr lvl="0" marL="457200" indent="-228600">
-              <a:buFont typeface="Calibri"/>
-              <a:spcAft>
-                <a:spcPts val="1000"/>
-              </a:spcAft>
-              <a:buSzPct val="100000"/>
-              <a:buChar char="•"/>
-              <a:lnSpc>
-                <a:spcPts val="2200"/>
-              </a:lnSpc>
-            </a:pPr>
-            <a:r>
-              <a:rPr sz="2000" b="0">
-                <a:solidFill>
-                  <a:srgbClr val="333333"/>
-                </a:solidFill>
-                <a:latin typeface="Calibri"/>
-              </a:rPr>
-              <a:t>Print the assignment table and score</a:t>
-            </a:r>
-          </a:p>
-        </p:txBody>
-      </p:sp>
-      <p:sp>
-        <p:nvSpPr>
-          <p:cNvPr id="4" name="TextBox 3"/>
+              <a:t>Coverage makes pinsValid true</a:t>
+            </a:r>
+          </a:p>
+        </p:txBody>
+      </p:sp>
+      <p:sp>
+        <p:nvSpPr>
+          <p:cNvPr id="5" name="TextBox 4"/>
           <p:cNvSpPr txBox="1"/>
           <p:nvPr/>
         </p:nvSpPr>
@@ -4689,21 +4951,45 @@
                 </a:solidFill>
                 <a:latin typeface="Calibri"/>
               </a:rPr>
-              <a:t>Pitfalls</a:t>
-            </a:r>
-          </a:p>
-        </p:txBody>
-      </p:sp>
-      <p:sp>
-        <p:nvSpPr>
-          <p:cNvPr id="3" name="TextBox 2"/>
+              <a:t>Empty set is invalid</a:t>
+            </a:r>
+          </a:p>
+        </p:txBody>
+      </p:sp>
+      <p:pic>
+        <p:nvPicPr>
+          <p:cNvPr id="3" name="Picture 2" descr="04-empty-bad.png"/>
+          <p:cNvPicPr>
+            <a:picLocks noChangeAspect="1"/>
+          </p:cNvPicPr>
+          <p:nvPr/>
+        </p:nvPicPr>
+        <p:blipFill>
+          <a:blip r:embed="rId2"/>
+          <a:stretch>
+            <a:fillRect/>
+          </a:stretch>
+        </p:blipFill>
+        <p:spPr>
+          <a:xfrm>
+            <a:off x="548640" y="1143000"/>
+            <a:ext cx="9424736" cy="4572000"/>
+          </a:xfrm>
+          <a:prstGeom prst="rect">
+            <a:avLst/>
+          </a:prstGeom>
+        </p:spPr>
+      </p:pic>
+      <p:sp>
+        <p:nvSpPr>
+          <p:cNvPr id="4" name="TextBox 3"/>
           <p:cNvSpPr txBox="1"/>
           <p:nvPr/>
         </p:nvSpPr>
         <p:spPr>
           <a:xfrm>
-            <a:off x="548640" y="1234440"/>
-            <a:ext cx="11064240" cy="4937760"/>
+            <a:off x="548640" y="5897880"/>
+            <a:ext cx="11064240" cy="411480"/>
           </a:xfrm>
           <a:prstGeom prst="rect">
             <a:avLst/>
@@ -4716,76 +5002,26 @@
           </a:bodyPr>
           <a:lstStyle/>
           <a:p>
-            <a:pPr lvl="0" marL="457200" indent="-228600">
-              <a:buFont typeface="Calibri"/>
-              <a:spcAft>
-                <a:spcPts val="1000"/>
-              </a:spcAft>
-              <a:buSzPct val="100000"/>
-              <a:buChar char="•"/>
+            <a:pPr>
               <a:lnSpc>
                 <a:spcPts val="2200"/>
               </a:lnSpc>
             </a:pPr>
             <a:r>
-              <a:rPr sz="2000" b="0">
+              <a:rPr sz="1200" b="0">
                 <a:solidFill>
                   <a:srgbClr val="333333"/>
                 </a:solidFill>
                 <a:latin typeface="Calibri"/>
               </a:rPr>
-              <a:t>Putting pins inside the outline instead of on the boundary breaks the model</a:t>
-            </a:r>
-          </a:p>
-          <a:p>
-            <a:pPr lvl="0" marL="457200" indent="-228600">
-              <a:buFont typeface="Calibri"/>
-              <a:spcAft>
-                <a:spcPts val="1000"/>
-              </a:spcAft>
-              <a:buSzPct val="100000"/>
-              <a:buChar char="•"/>
-              <a:lnSpc>
-                <a:spcPts val="2200"/>
-              </a:lnSpc>
-            </a:pPr>
-            <a:r>
-              <a:rPr sz="2000" b="0">
-                <a:solidFill>
-                  <a:srgbClr val="333333"/>
-                </a:solidFill>
-                <a:latin typeface="Calibri"/>
-              </a:rPr>
-              <a:t>Crowding every pin onto one edge creates congestion you won’t see if you only watch</a:t>
-            </a:r>
-          </a:p>
-          <a:p>
-            <a:pPr lvl="0" marL="457200" indent="-228600">
-              <a:buFont typeface="Calibri"/>
-              <a:spcAft>
-                <a:spcPts val="1000"/>
-              </a:spcAft>
-              <a:buSzPct val="100000"/>
-              <a:buChar char="•"/>
-              <a:lnSpc>
-                <a:spcPts val="2200"/>
-              </a:lnSpc>
-            </a:pPr>
-            <a:r>
-              <a:rPr sz="2000" b="0">
-                <a:solidFill>
-                  <a:srgbClr val="333333"/>
-                </a:solidFill>
-                <a:latin typeface="Calibri"/>
-              </a:rPr>
-              <a:t>Don’t forget that pin order on an edge can matter for packaging, even on a toy</a:t>
-            </a:r>
-          </a:p>
-        </p:txBody>
-      </p:sp>
-      <p:sp>
-        <p:nvSpPr>
-          <p:cNvPr id="4" name="TextBox 3"/>
+              <a:t>Empty set is invalid</a:t>
+            </a:r>
+          </a:p>
+        </p:txBody>
+      </p:sp>
+      <p:sp>
+        <p:nvSpPr>
+          <p:cNvPr id="5" name="TextBox 4"/>
           <p:cNvSpPr txBox="1"/>
           <p:nvPr/>
         </p:nvSpPr>
@@ -4874,7 +5110,166 @@
                 </a:solidFill>
                 <a:latin typeface="Calibri"/>
               </a:rPr>
-              <a:t>Your turn</a:t>
+              <a:t>Pins feed place and route</a:t>
+            </a:r>
+          </a:p>
+        </p:txBody>
+      </p:sp>
+      <p:pic>
+        <p:nvPicPr>
+          <p:cNvPr id="3" name="Picture 2" descr="05-takeaway.png"/>
+          <p:cNvPicPr>
+            <a:picLocks noChangeAspect="1"/>
+          </p:cNvPicPr>
+          <p:nvPr/>
+        </p:nvPicPr>
+        <p:blipFill>
+          <a:blip r:embed="rId2"/>
+          <a:stretch>
+            <a:fillRect/>
+          </a:stretch>
+        </p:blipFill>
+        <p:spPr>
+          <a:xfrm>
+            <a:off x="548640" y="1143000"/>
+            <a:ext cx="9424736" cy="4572000"/>
+          </a:xfrm>
+          <a:prstGeom prst="rect">
+            <a:avLst/>
+          </a:prstGeom>
+        </p:spPr>
+      </p:pic>
+      <p:sp>
+        <p:nvSpPr>
+          <p:cNvPr id="4" name="TextBox 3"/>
+          <p:cNvSpPr txBox="1"/>
+          <p:nvPr/>
+        </p:nvSpPr>
+        <p:spPr>
+          <a:xfrm>
+            <a:off x="548640" y="5897880"/>
+            <a:ext cx="11064240" cy="411480"/>
+          </a:xfrm>
+          <a:prstGeom prst="rect">
+            <a:avLst/>
+          </a:prstGeom>
+          <a:noFill/>
+        </p:spPr>
+        <p:txBody>
+          <a:bodyPr wrap="square">
+            <a:noAutofit/>
+          </a:bodyPr>
+          <a:lstStyle/>
+          <a:p>
+            <a:pPr>
+              <a:lnSpc>
+                <a:spcPts val="2200"/>
+              </a:lnSpc>
+            </a:pPr>
+            <a:r>
+              <a:rPr sz="1200" b="0">
+                <a:solidFill>
+                  <a:srgbClr val="333333"/>
+                </a:solidFill>
+                <a:latin typeface="Calibri"/>
+              </a:rPr>
+              <a:t>Pins feed place and route</a:t>
+            </a:r>
+          </a:p>
+        </p:txBody>
+      </p:sp>
+      <p:sp>
+        <p:nvSpPr>
+          <p:cNvPr id="5" name="TextBox 4"/>
+          <p:cNvSpPr txBox="1"/>
+          <p:nvPr/>
+        </p:nvSpPr>
+        <p:spPr>
+          <a:xfrm>
+            <a:off x="548640" y="6355080"/>
+            <a:ext cx="11064240" cy="320040"/>
+          </a:xfrm>
+          <a:prstGeom prst="rect">
+            <a:avLst/>
+          </a:prstGeom>
+          <a:noFill/>
+        </p:spPr>
+        <p:txBody>
+          <a:bodyPr wrap="square">
+            <a:noAutofit/>
+          </a:bodyPr>
+          <a:lstStyle/>
+          <a:p>
+            <a:pPr algn="r">
+              <a:lnSpc>
+                <a:spcPts val="2200"/>
+              </a:lnSpc>
+              <a:defRPr sz="1000" b="0">
+                <a:solidFill>
+                  <a:srgbClr val="666666"/>
+                </a:solidFill>
+                <a:latin typeface="Calibri"/>
+              </a:defRPr>
+            </a:pPr>
+            <a:r>
+              <a:t>learn_floorplanning — 03 pin assignment</a:t>
+            </a:r>
+          </a:p>
+        </p:txBody>
+      </p:sp>
+    </p:spTree>
+  </p:cSld>
+  <p:clrMapOvr>
+    <a:masterClrMapping/>
+  </p:clrMapOvr>
+</p:sld>
+</file>
+
+<file path=ppt/slides/slide7.xml><?xml version="1.0" encoding="utf-8"?>
+<p:sld xmlns:a="http://schemas.openxmlformats.org/drawingml/2006/main" xmlns:p="http://schemas.openxmlformats.org/presentationml/2006/main" xmlns:r="http://schemas.openxmlformats.org/officeDocument/2006/relationships">
+  <p:cSld>
+    <p:spTree>
+      <p:nvGrpSpPr>
+        <p:cNvPr id="1" name=""/>
+        <p:cNvGrpSpPr/>
+        <p:nvPr/>
+      </p:nvGrpSpPr>
+      <p:grpSpPr/>
+      <p:sp>
+        <p:nvSpPr>
+          <p:cNvPr id="2" name="TextBox 1"/>
+          <p:cNvSpPr txBox="1"/>
+          <p:nvPr/>
+        </p:nvSpPr>
+        <p:spPr>
+          <a:xfrm>
+            <a:off x="548640" y="411480"/>
+            <a:ext cx="11064240" cy="777240"/>
+          </a:xfrm>
+          <a:prstGeom prst="rect">
+            <a:avLst/>
+          </a:prstGeom>
+          <a:noFill/>
+        </p:spPr>
+        <p:txBody>
+          <a:bodyPr wrap="square">
+            <a:noAutofit/>
+          </a:bodyPr>
+          <a:lstStyle/>
+          <a:p>
+            <a:pPr>
+              <a:lnSpc>
+                <a:spcPts val="2200"/>
+              </a:lnSpc>
+            </a:pPr>
+            <a:r>
+              <a:rPr sz="2800" b="1">
+                <a:solidFill>
+                  <a:srgbClr val="1A1A2E"/>
+                </a:solidFill>
+                <a:latin typeface="Calibri"/>
+              </a:rPr>
+              <a:t>Browser lab track</a:t>
             </a:r>
           </a:p>
         </p:txBody>
@@ -4919,7 +5314,7 @@
                 </a:solidFill>
                 <a:latin typeface="Calibri"/>
               </a:rPr>
-              <a:t>Assign boundary pins and report a wirelength proxy beside deadspace</a:t>
+              <a:t>Open pin-assignment</a:t>
             </a:r>
           </a:p>
           <a:p>
@@ -4941,7 +5336,333 @@
                 </a:solidFill>
                 <a:latin typeface="Calibri"/>
               </a:rPr>
-              <a:t>Then continue to offline compare, and finally the wrap</a:t>
+              <a:t>Assign golden pins, confirm four sides and valid true</a:t>
+            </a:r>
+          </a:p>
+          <a:p>
+            <a:pPr lvl="0" marL="457200" indent="-228600">
+              <a:buFont typeface="Calibri"/>
+              <a:spcAft>
+                <a:spcPts val="1000"/>
+              </a:spcAft>
+              <a:buSzPct val="100000"/>
+              <a:buChar char="•"/>
+              <a:lnSpc>
+                <a:spcPts val="2200"/>
+              </a:lnSpc>
+            </a:pPr>
+            <a:r>
+              <a:rPr sz="2000" b="0">
+                <a:solidFill>
+                  <a:srgbClr val="333333"/>
+                </a:solidFill>
+                <a:latin typeface="Calibri"/>
+              </a:rPr>
+              <a:t>Clear pins and watch validity fail</a:t>
+            </a:r>
+          </a:p>
+        </p:txBody>
+      </p:sp>
+      <p:sp>
+        <p:nvSpPr>
+          <p:cNvPr id="4" name="TextBox 3"/>
+          <p:cNvSpPr txBox="1"/>
+          <p:nvPr/>
+        </p:nvSpPr>
+        <p:spPr>
+          <a:xfrm>
+            <a:off x="548640" y="6355080"/>
+            <a:ext cx="11064240" cy="320040"/>
+          </a:xfrm>
+          <a:prstGeom prst="rect">
+            <a:avLst/>
+          </a:prstGeom>
+          <a:noFill/>
+        </p:spPr>
+        <p:txBody>
+          <a:bodyPr wrap="square">
+            <a:noAutofit/>
+          </a:bodyPr>
+          <a:lstStyle/>
+          <a:p>
+            <a:pPr algn="r">
+              <a:lnSpc>
+                <a:spcPts val="2200"/>
+              </a:lnSpc>
+              <a:defRPr sz="1000" b="0">
+                <a:solidFill>
+                  <a:srgbClr val="666666"/>
+                </a:solidFill>
+                <a:latin typeface="Calibri"/>
+              </a:defRPr>
+            </a:pPr>
+            <a:r>
+              <a:t>learn_floorplanning — 03 pin assignment</a:t>
+            </a:r>
+          </a:p>
+        </p:txBody>
+      </p:sp>
+    </p:spTree>
+  </p:cSld>
+  <p:clrMapOvr>
+    <a:masterClrMapping/>
+  </p:clrMapOvr>
+</p:sld>
+</file>
+
+<file path=ppt/slides/slide8.xml><?xml version="1.0" encoding="utf-8"?>
+<p:sld xmlns:a="http://schemas.openxmlformats.org/drawingml/2006/main" xmlns:p="http://schemas.openxmlformats.org/presentationml/2006/main" xmlns:r="http://schemas.openxmlformats.org/officeDocument/2006/relationships">
+  <p:cSld>
+    <p:spTree>
+      <p:nvGrpSpPr>
+        <p:cNvPr id="1" name=""/>
+        <p:cNvGrpSpPr/>
+        <p:nvPr/>
+      </p:nvGrpSpPr>
+      <p:grpSpPr/>
+      <p:sp>
+        <p:nvSpPr>
+          <p:cNvPr id="2" name="TextBox 1"/>
+          <p:cNvSpPr txBox="1"/>
+          <p:nvPr/>
+        </p:nvSpPr>
+        <p:spPr>
+          <a:xfrm>
+            <a:off x="548640" y="411480"/>
+            <a:ext cx="11064240" cy="777240"/>
+          </a:xfrm>
+          <a:prstGeom prst="rect">
+            <a:avLst/>
+          </a:prstGeom>
+          <a:noFill/>
+        </p:spPr>
+        <p:txBody>
+          <a:bodyPr wrap="square">
+            <a:noAutofit/>
+          </a:bodyPr>
+          <a:lstStyle/>
+          <a:p>
+            <a:pPr>
+              <a:lnSpc>
+                <a:spcPts val="2200"/>
+              </a:lnSpc>
+            </a:pPr>
+            <a:r>
+              <a:rPr sz="2800" b="1">
+                <a:solidFill>
+                  <a:srgbClr val="1A1A2E"/>
+                </a:solidFill>
+                <a:latin typeface="Calibri"/>
+              </a:rPr>
+              <a:t>Implement track</a:t>
+            </a:r>
+          </a:p>
+        </p:txBody>
+      </p:sp>
+      <p:sp>
+        <p:nvSpPr>
+          <p:cNvPr id="3" name="TextBox 2"/>
+          <p:cNvSpPr txBox="1"/>
+          <p:nvPr/>
+        </p:nvSpPr>
+        <p:spPr>
+          <a:xfrm>
+            <a:off x="548640" y="1234440"/>
+            <a:ext cx="11064240" cy="4937760"/>
+          </a:xfrm>
+          <a:prstGeom prst="rect">
+            <a:avLst/>
+          </a:prstGeom>
+          <a:noFill/>
+        </p:spPr>
+        <p:txBody>
+          <a:bodyPr wrap="square">
+            <a:noAutofit/>
+          </a:bodyPr>
+          <a:lstStyle/>
+          <a:p>
+            <a:pPr lvl="0" marL="457200" indent="-228600">
+              <a:buFont typeface="Calibri"/>
+              <a:spcAft>
+                <a:spcPts val="1000"/>
+              </a:spcAft>
+              <a:buSzPct val="100000"/>
+              <a:buChar char="•"/>
+              <a:lnSpc>
+                <a:spcPts val="2200"/>
+              </a:lnSpc>
+            </a:pPr>
+            <a:r>
+              <a:rPr sz="2000" b="0">
+                <a:solidFill>
+                  <a:srgbClr val="333333"/>
+                </a:solidFill>
+                <a:latin typeface="Calibri"/>
+              </a:rPr>
+              <a:t>Implement pinsValid requiring all four sides and in-range offsets</a:t>
+            </a:r>
+          </a:p>
+          <a:p>
+            <a:pPr lvl="0" marL="457200" indent="-228600">
+              <a:buFont typeface="Calibri"/>
+              <a:spcAft>
+                <a:spcPts val="1000"/>
+              </a:spcAft>
+              <a:buSzPct val="100000"/>
+              <a:buChar char="•"/>
+              <a:lnSpc>
+                <a:spcPts val="2200"/>
+              </a:lnSpc>
+            </a:pPr>
+            <a:r>
+              <a:rPr sz="2000" b="0">
+                <a:solidFill>
+                  <a:srgbClr val="333333"/>
+                </a:solidFill>
+                <a:latin typeface="Calibri"/>
+              </a:rPr>
+              <a:t>Assert golden pins pass and the empty list fails</a:t>
+            </a:r>
+          </a:p>
+        </p:txBody>
+      </p:sp>
+      <p:sp>
+        <p:nvSpPr>
+          <p:cNvPr id="4" name="TextBox 3"/>
+          <p:cNvSpPr txBox="1"/>
+          <p:nvPr/>
+        </p:nvSpPr>
+        <p:spPr>
+          <a:xfrm>
+            <a:off x="548640" y="6355080"/>
+            <a:ext cx="11064240" cy="320040"/>
+          </a:xfrm>
+          <a:prstGeom prst="rect">
+            <a:avLst/>
+          </a:prstGeom>
+          <a:noFill/>
+        </p:spPr>
+        <p:txBody>
+          <a:bodyPr wrap="square">
+            <a:noAutofit/>
+          </a:bodyPr>
+          <a:lstStyle/>
+          <a:p>
+            <a:pPr algn="r">
+              <a:lnSpc>
+                <a:spcPts val="2200"/>
+              </a:lnSpc>
+              <a:defRPr sz="1000" b="0">
+                <a:solidFill>
+                  <a:srgbClr val="666666"/>
+                </a:solidFill>
+                <a:latin typeface="Calibri"/>
+              </a:defRPr>
+            </a:pPr>
+            <a:r>
+              <a:t>learn_floorplanning — 03 pin assignment</a:t>
+            </a:r>
+          </a:p>
+        </p:txBody>
+      </p:sp>
+    </p:spTree>
+  </p:cSld>
+  <p:clrMapOvr>
+    <a:masterClrMapping/>
+  </p:clrMapOvr>
+</p:sld>
+</file>
+
+<file path=ppt/slides/slide9.xml><?xml version="1.0" encoding="utf-8"?>
+<p:sld xmlns:a="http://schemas.openxmlformats.org/drawingml/2006/main" xmlns:p="http://schemas.openxmlformats.org/presentationml/2006/main" xmlns:r="http://schemas.openxmlformats.org/officeDocument/2006/relationships">
+  <p:cSld>
+    <p:spTree>
+      <p:nvGrpSpPr>
+        <p:cNvPr id="1" name=""/>
+        <p:cNvGrpSpPr/>
+        <p:nvPr/>
+      </p:nvGrpSpPr>
+      <p:grpSpPr/>
+      <p:sp>
+        <p:nvSpPr>
+          <p:cNvPr id="2" name="TextBox 1"/>
+          <p:cNvSpPr txBox="1"/>
+          <p:nvPr/>
+        </p:nvSpPr>
+        <p:spPr>
+          <a:xfrm>
+            <a:off x="548640" y="411480"/>
+            <a:ext cx="11064240" cy="777240"/>
+          </a:xfrm>
+          <a:prstGeom prst="rect">
+            <a:avLst/>
+          </a:prstGeom>
+          <a:noFill/>
+        </p:spPr>
+        <p:txBody>
+          <a:bodyPr wrap="square">
+            <a:noAutofit/>
+          </a:bodyPr>
+          <a:lstStyle/>
+          <a:p>
+            <a:pPr>
+              <a:lnSpc>
+                <a:spcPts val="2200"/>
+              </a:lnSpc>
+            </a:pPr>
+            <a:r>
+              <a:rPr sz="2800" b="1">
+                <a:solidFill>
+                  <a:srgbClr val="1A1A2E"/>
+                </a:solidFill>
+                <a:latin typeface="Calibri"/>
+              </a:rPr>
+              <a:t>Pitfalls</a:t>
+            </a:r>
+          </a:p>
+        </p:txBody>
+      </p:sp>
+      <p:sp>
+        <p:nvSpPr>
+          <p:cNvPr id="3" name="TextBox 2"/>
+          <p:cNvSpPr txBox="1"/>
+          <p:nvPr/>
+        </p:nvSpPr>
+        <p:spPr>
+          <a:xfrm>
+            <a:off x="548640" y="1234440"/>
+            <a:ext cx="11064240" cy="4937760"/>
+          </a:xfrm>
+          <a:prstGeom prst="rect">
+            <a:avLst/>
+          </a:prstGeom>
+          <a:noFill/>
+        </p:spPr>
+        <p:txBody>
+          <a:bodyPr wrap="square">
+            <a:noAutofit/>
+          </a:bodyPr>
+          <a:lstStyle/>
+          <a:p>
+            <a:pPr lvl="0" marL="457200" indent="-228600">
+              <a:buFont typeface="Calibri"/>
+              <a:spcAft>
+                <a:spcPts val="1000"/>
+              </a:spcAft>
+              <a:buSzPct val="100000"/>
+              <a:buChar char="•"/>
+              <a:lnSpc>
+                <a:spcPts val="2200"/>
+              </a:lnSpc>
+            </a:pPr>
+            <a:r>
+              <a:rPr sz="2000" b="0">
+                <a:solidFill>
+                  <a:srgbClr val="333333"/>
+                </a:solidFill>
+                <a:latin typeface="Calibri"/>
+              </a:rPr>
+              <a:t>Putting pins inside modules</a:t>
             </a:r>
           </a:p>
         </p:txBody>

--- a/courses/learn_floorplanning/module04-03-pin-assignment/slides.pptx
+++ b/courses/learn_floorplanning/module04-03-pin-assignment/slides.pptx
@@ -15,6 +15,9 @@
     <p:sldId id="263" r:id="rId15"/>
     <p:sldId id="264" r:id="rId16"/>
     <p:sldId id="265" r:id="rId17"/>
+    <p:sldId id="266" r:id="rId18"/>
+    <p:sldId id="267" r:id="rId19"/>
+    <p:sldId id="268" r:id="rId20"/>
   </p:sldIdLst>
   <p:sldSz cx="12191695" cy="6858000" type="screen4x3"/>
   <p:notesSz cx="6858000" cy="9144000"/>
@@ -514,12 +517,6 @@
               <a:t>Pins sit on outline edges. Golden assignment places P0 left, P1 bottom, P2 right, P3 top—four sides covered so pinsValid is true. An empty list is invalid.</a:t>
             </a:r>
           </a:p>
-          <a:p/>
-          <a:p>
-            <a:r>
-              <a:t>&lt;!-- algorithm-walkthrough --&gt;</a:t>
-            </a:r>
-          </a:p>
         </p:txBody>
       </p:sp>
       <p:sp>
@@ -587,6 +584,146 @@
           <a:lstStyle/>
           <a:p>
             <a:r>
+              <a:t>Implement pinsValid requiring all four sides and in-range offsets. Assert golden pins pass and the empty list fails.</a:t>
+            </a:r>
+          </a:p>
+        </p:txBody>
+      </p:sp>
+      <p:sp>
+        <p:nvSpPr>
+          <p:cNvPr id="4" name="Slide Number Placeholder 3"/>
+          <p:cNvSpPr>
+            <a:spLocks noGrp="1"/>
+          </p:cNvSpPr>
+          <p:nvPr>
+            <p:ph type="sldNum" idx="5" sz="quarter"/>
+          </p:nvPr>
+        </p:nvSpPr>
+        <p:spPr/>
+      </p:sp>
+    </p:spTree>
+  </p:cSld>
+  <p:clrMapOvr>
+    <a:masterClrMapping/>
+  </p:clrMapOvr>
+</p:notes>
+</file>
+
+<file path=ppt/notesSlides/notesSlide11.xml><?xml version="1.0" encoding="utf-8"?>
+<p:notes xmlns:a="http://schemas.openxmlformats.org/drawingml/2006/main" xmlns:p="http://schemas.openxmlformats.org/presentationml/2006/main" xmlns:r="http://schemas.openxmlformats.org/officeDocument/2006/relationships">
+  <p:cSld>
+    <p:spTree>
+      <p:nvGrpSpPr>
+        <p:cNvPr id="1" name=""/>
+        <p:cNvGrpSpPr/>
+        <p:nvPr/>
+      </p:nvGrpSpPr>
+      <p:grpSpPr>
+        <a:xfrm>
+          <a:off x="0" y="0"/>
+          <a:ext cx="0" cy="0"/>
+          <a:chOff x="0" y="0"/>
+          <a:chExt cx="0" cy="0"/>
+        </a:xfrm>
+      </p:grpSpPr>
+      <p:sp>
+        <p:nvSpPr>
+          <p:cNvPr id="2" name="Slide Image Placeholder 1"/>
+          <p:cNvSpPr>
+            <a:spLocks noGrp="1"/>
+          </p:cNvSpPr>
+          <p:nvPr>
+            <p:ph type="sldImg" idx="2"/>
+          </p:nvPr>
+        </p:nvSpPr>
+        <p:spPr/>
+      </p:sp>
+      <p:sp>
+        <p:nvSpPr>
+          <p:cNvPr id="3" name="Notes Placeholder 2"/>
+          <p:cNvSpPr>
+            <a:spLocks noGrp="1"/>
+          </p:cNvSpPr>
+          <p:nvPr>
+            <p:ph type="body" idx="3" sz="quarter"/>
+          </p:nvPr>
+        </p:nvSpPr>
+        <p:spPr/>
+        <p:txBody>
+          <a:bodyPr/>
+          <a:lstStyle/>
+          <a:p>
+            <a:r>
+              <a:t>Putting pins inside modules; offsets past edge length; claiming validity with only two sides covered.</a:t>
+            </a:r>
+          </a:p>
+        </p:txBody>
+      </p:sp>
+      <p:sp>
+        <p:nvSpPr>
+          <p:cNvPr id="4" name="Slide Number Placeholder 3"/>
+          <p:cNvSpPr>
+            <a:spLocks noGrp="1"/>
+          </p:cNvSpPr>
+          <p:nvPr>
+            <p:ph type="sldNum" idx="5" sz="quarter"/>
+          </p:nvPr>
+        </p:nvSpPr>
+        <p:spPr/>
+      </p:sp>
+    </p:spTree>
+  </p:cSld>
+  <p:clrMapOvr>
+    <a:masterClrMapping/>
+  </p:clrMapOvr>
+</p:notes>
+</file>
+
+<file path=ppt/notesSlides/notesSlide12.xml><?xml version="1.0" encoding="utf-8"?>
+<p:notes xmlns:a="http://schemas.openxmlformats.org/drawingml/2006/main" xmlns:p="http://schemas.openxmlformats.org/presentationml/2006/main" xmlns:r="http://schemas.openxmlformats.org/officeDocument/2006/relationships">
+  <p:cSld>
+    <p:spTree>
+      <p:nvGrpSpPr>
+        <p:cNvPr id="1" name=""/>
+        <p:cNvGrpSpPr/>
+        <p:nvPr/>
+      </p:nvGrpSpPr>
+      <p:grpSpPr>
+        <a:xfrm>
+          <a:off x="0" y="0"/>
+          <a:ext cx="0" cy="0"/>
+          <a:chOff x="0" y="0"/>
+          <a:chExt cx="0" cy="0"/>
+        </a:xfrm>
+      </p:grpSpPr>
+      <p:sp>
+        <p:nvSpPr>
+          <p:cNvPr id="2" name="Slide Image Placeholder 1"/>
+          <p:cNvSpPr>
+            <a:spLocks noGrp="1"/>
+          </p:cNvSpPr>
+          <p:nvPr>
+            <p:ph type="sldImg" idx="2"/>
+          </p:nvPr>
+        </p:nvSpPr>
+        <p:spPr/>
+      </p:sp>
+      <p:sp>
+        <p:nvSpPr>
+          <p:cNvPr id="3" name="Notes Placeholder 2"/>
+          <p:cNvSpPr>
+            <a:spLocks noGrp="1"/>
+          </p:cNvSpPr>
+          <p:nvPr>
+            <p:ph type="body" idx="3" sz="quarter"/>
+          </p:nvPr>
+        </p:nvSpPr>
+        <p:spPr/>
+        <p:txBody>
+          <a:bodyPr/>
+          <a:lstStyle/>
+          <a:p>
+            <a:r>
               <a:t>Ship a valid four-side assignment. Offline compare is next; then the wrap points to learn_placement.</a:t>
             </a:r>
           </a:p>
@@ -657,7 +794,13 @@
           <a:lstStyle/>
           <a:p>
             <a:r>
-              <a:t>Start from the golden packing with an empty pin list. Pins will sit on outline edges—not inside modules—for I/O literacy.</a:t>
+              <a:t>Pin assignment validates boundary I/O. Pseudocode checks side and offset ranges and requires all four outline sides to appear.</a:t>
+            </a:r>
+          </a:p>
+          <a:p/>
+          <a:p>
+            <a:r>
+              <a:t>Open this module's examples file and find the Pseudocode section. That written sketch is what you implement on the implement track and what the browser challenges measure.</a:t>
             </a:r>
           </a:p>
         </p:txBody>
@@ -727,7 +870,7 @@
           <a:lstStyle/>
           <a:p>
             <a:r>
-              <a:t>Golden pins place P0 on the left, P1 on the bottom, P2 on the right, and P3 on the top. Offsets stay inside each edge length.</a:t>
+              <a:t>Golden pins cover left, bottom, right, and top and return valid true. An empty list fails validity.</a:t>
             </a:r>
           </a:p>
         </p:txBody>
@@ -797,7 +940,7 @@
           <a:lstStyle/>
           <a:p>
             <a:r>
-              <a:t>pinsValid requires every side to appear and offsets to lie on the edge. The golden set covers all four sides—valid returns true.</a:t>
+              <a:t>Start from the golden packing with an empty pin list. Pins will sit on outline edges—not inside modules—for I/O literacy.</a:t>
             </a:r>
           </a:p>
         </p:txBody>
@@ -867,7 +1010,7 @@
           <a:lstStyle/>
           <a:p>
             <a:r>
-              <a:t>Clear the pins and validity fails: you no longer cover four sides. Assignment is a first-class constraint, not decoration.</a:t>
+              <a:t>Golden pins place P0 on the left, P1 on the bottom, P2 on the right, and P3 on the top. Offsets stay inside each edge length.</a:t>
             </a:r>
           </a:p>
         </p:txBody>
@@ -937,13 +1080,7 @@
           <a:lstStyle/>
           <a:p>
             <a:r>
-              <a:t>Boundary pins shape terminal propagation and routing demand. After floorplan shapes settle, pin assignment is the bridge to placement.</a:t>
-            </a:r>
-          </a:p>
-          <a:p/>
-          <a:p>
-            <a:r>
-              <a:t>&lt;!-- /algorithm-walkthrough --&gt;</a:t>
+              <a:t>pinsValid requires every side to appear and offsets to lie on the edge. The golden set covers all four sides—valid returns true.</a:t>
             </a:r>
           </a:p>
         </p:txBody>
@@ -1013,7 +1150,7 @@
           <a:lstStyle/>
           <a:p>
             <a:r>
-              <a:t>Open pin-assignment. Assign golden pins, confirm four sides and valid true. Clear pins and watch validity fail.</a:t>
+              <a:t>Clear the pins and validity fails: you no longer cover four sides. Assignment is a first-class constraint, not decoration.</a:t>
             </a:r>
           </a:p>
         </p:txBody>
@@ -1083,7 +1220,7 @@
           <a:lstStyle/>
           <a:p>
             <a:r>
-              <a:t>Implement pinsValid requiring all four sides and in-range offsets. Assert golden pins pass and the empty list fails.</a:t>
+              <a:t>Boundary pins shape terminal propagation and routing demand. After floorplan shapes settle, pin assignment is the bridge to placement.</a:t>
             </a:r>
           </a:p>
         </p:txBody>
@@ -1153,7 +1290,7 @@
           <a:lstStyle/>
           <a:p>
             <a:r>
-              <a:t>Putting pins inside modules; offsets past edge length; claiming validity with only two sides covered.</a:t>
+              <a:t>Open pin-assignment. Assign golden pins, confirm four sides and valid true. Clear pins and watch validity fail.</a:t>
             </a:r>
           </a:p>
         </p:txBody>
@@ -4311,7 +4448,7 @@
                 </a:solidFill>
                 <a:latin typeface="Calibri"/>
               </a:rPr>
-              <a:t>Your turn</a:t>
+              <a:t>Browser lab track</a:t>
             </a:r>
           </a:p>
         </p:txBody>
@@ -4356,7 +4493,7 @@
                 </a:solidFill>
                 <a:latin typeface="Calibri"/>
               </a:rPr>
-              <a:t>Ship a valid four-side assignment</a:t>
+              <a:t>Open pin-assignment</a:t>
             </a:r>
           </a:p>
           <a:p>
@@ -4378,7 +4515,29 @@
                 </a:solidFill>
                 <a:latin typeface="Calibri"/>
               </a:rPr>
-              <a:t>Offline compare is next; then the wrap points to learn_placement</a:t>
+              <a:t>Assign golden pins, confirm four sides and valid true</a:t>
+            </a:r>
+          </a:p>
+          <a:p>
+            <a:pPr lvl="0" marL="457200" indent="-228600">
+              <a:buFont typeface="Calibri"/>
+              <a:spcAft>
+                <a:spcPts val="1000"/>
+              </a:spcAft>
+              <a:buSzPct val="100000"/>
+              <a:buChar char="•"/>
+              <a:lnSpc>
+                <a:spcPts val="2200"/>
+              </a:lnSpc>
+            </a:pPr>
+            <a:r>
+              <a:rPr sz="2000" b="0">
+                <a:solidFill>
+                  <a:srgbClr val="333333"/>
+                </a:solidFill>
+                <a:latin typeface="Calibri"/>
+              </a:rPr>
+              <a:t>Clear pins and watch validity fail</a:t>
             </a:r>
           </a:p>
         </p:txBody>
@@ -4430,7 +4589,1098 @@
 </p:sld>
 </file>
 
+<file path=ppt/slides/slide11.xml><?xml version="1.0" encoding="utf-8"?>
+<p:sld xmlns:a="http://schemas.openxmlformats.org/drawingml/2006/main" xmlns:p="http://schemas.openxmlformats.org/presentationml/2006/main" xmlns:r="http://schemas.openxmlformats.org/officeDocument/2006/relationships">
+  <p:cSld>
+    <p:spTree>
+      <p:nvGrpSpPr>
+        <p:cNvPr id="1" name=""/>
+        <p:cNvGrpSpPr/>
+        <p:nvPr/>
+      </p:nvGrpSpPr>
+      <p:grpSpPr/>
+      <p:sp>
+        <p:nvSpPr>
+          <p:cNvPr id="2" name="TextBox 1"/>
+          <p:cNvSpPr txBox="1"/>
+          <p:nvPr/>
+        </p:nvSpPr>
+        <p:spPr>
+          <a:xfrm>
+            <a:off x="548640" y="411480"/>
+            <a:ext cx="11064240" cy="777240"/>
+          </a:xfrm>
+          <a:prstGeom prst="rect">
+            <a:avLst/>
+          </a:prstGeom>
+          <a:noFill/>
+        </p:spPr>
+        <p:txBody>
+          <a:bodyPr wrap="square">
+            <a:noAutofit/>
+          </a:bodyPr>
+          <a:lstStyle/>
+          <a:p>
+            <a:pPr>
+              <a:lnSpc>
+                <a:spcPts val="2200"/>
+              </a:lnSpc>
+            </a:pPr>
+            <a:r>
+              <a:rPr sz="2800" b="1">
+                <a:solidFill>
+                  <a:srgbClr val="1A1A2E"/>
+                </a:solidFill>
+                <a:latin typeface="Calibri"/>
+              </a:rPr>
+              <a:t>Implement track</a:t>
+            </a:r>
+          </a:p>
+        </p:txBody>
+      </p:sp>
+      <p:sp>
+        <p:nvSpPr>
+          <p:cNvPr id="3" name="TextBox 2"/>
+          <p:cNvSpPr txBox="1"/>
+          <p:nvPr/>
+        </p:nvSpPr>
+        <p:spPr>
+          <a:xfrm>
+            <a:off x="548640" y="1234440"/>
+            <a:ext cx="11064240" cy="4937760"/>
+          </a:xfrm>
+          <a:prstGeom prst="rect">
+            <a:avLst/>
+          </a:prstGeom>
+          <a:noFill/>
+        </p:spPr>
+        <p:txBody>
+          <a:bodyPr wrap="square">
+            <a:noAutofit/>
+          </a:bodyPr>
+          <a:lstStyle/>
+          <a:p>
+            <a:pPr lvl="0" marL="457200" indent="-228600">
+              <a:buFont typeface="Calibri"/>
+              <a:spcAft>
+                <a:spcPts val="1000"/>
+              </a:spcAft>
+              <a:buSzPct val="100000"/>
+              <a:buChar char="•"/>
+              <a:lnSpc>
+                <a:spcPts val="2200"/>
+              </a:lnSpc>
+            </a:pPr>
+            <a:r>
+              <a:rPr sz="2000" b="0">
+                <a:solidFill>
+                  <a:srgbClr val="333333"/>
+                </a:solidFill>
+                <a:latin typeface="Calibri"/>
+              </a:rPr>
+              <a:t>Implement pinsValid requiring all four sides and in-range offsets</a:t>
+            </a:r>
+          </a:p>
+          <a:p>
+            <a:pPr lvl="0" marL="457200" indent="-228600">
+              <a:buFont typeface="Calibri"/>
+              <a:spcAft>
+                <a:spcPts val="1000"/>
+              </a:spcAft>
+              <a:buSzPct val="100000"/>
+              <a:buChar char="•"/>
+              <a:lnSpc>
+                <a:spcPts val="2200"/>
+              </a:lnSpc>
+            </a:pPr>
+            <a:r>
+              <a:rPr sz="2000" b="0">
+                <a:solidFill>
+                  <a:srgbClr val="333333"/>
+                </a:solidFill>
+                <a:latin typeface="Calibri"/>
+              </a:rPr>
+              <a:t>Assert golden pins pass and the empty list fails</a:t>
+            </a:r>
+          </a:p>
+        </p:txBody>
+      </p:sp>
+      <p:sp>
+        <p:nvSpPr>
+          <p:cNvPr id="4" name="TextBox 3"/>
+          <p:cNvSpPr txBox="1"/>
+          <p:nvPr/>
+        </p:nvSpPr>
+        <p:spPr>
+          <a:xfrm>
+            <a:off x="548640" y="6355080"/>
+            <a:ext cx="11064240" cy="320040"/>
+          </a:xfrm>
+          <a:prstGeom prst="rect">
+            <a:avLst/>
+          </a:prstGeom>
+          <a:noFill/>
+        </p:spPr>
+        <p:txBody>
+          <a:bodyPr wrap="square">
+            <a:noAutofit/>
+          </a:bodyPr>
+          <a:lstStyle/>
+          <a:p>
+            <a:pPr algn="r">
+              <a:lnSpc>
+                <a:spcPts val="2200"/>
+              </a:lnSpc>
+              <a:defRPr sz="1000" b="0">
+                <a:solidFill>
+                  <a:srgbClr val="666666"/>
+                </a:solidFill>
+                <a:latin typeface="Calibri"/>
+              </a:defRPr>
+            </a:pPr>
+            <a:r>
+              <a:t>learn_floorplanning — 03 pin assignment</a:t>
+            </a:r>
+          </a:p>
+        </p:txBody>
+      </p:sp>
+    </p:spTree>
+  </p:cSld>
+  <p:clrMapOvr>
+    <a:masterClrMapping/>
+  </p:clrMapOvr>
+</p:sld>
+</file>
+
+<file path=ppt/slides/slide12.xml><?xml version="1.0" encoding="utf-8"?>
+<p:sld xmlns:a="http://schemas.openxmlformats.org/drawingml/2006/main" xmlns:p="http://schemas.openxmlformats.org/presentationml/2006/main" xmlns:r="http://schemas.openxmlformats.org/officeDocument/2006/relationships">
+  <p:cSld>
+    <p:spTree>
+      <p:nvGrpSpPr>
+        <p:cNvPr id="1" name=""/>
+        <p:cNvGrpSpPr/>
+        <p:nvPr/>
+      </p:nvGrpSpPr>
+      <p:grpSpPr/>
+      <p:sp>
+        <p:nvSpPr>
+          <p:cNvPr id="2" name="TextBox 1"/>
+          <p:cNvSpPr txBox="1"/>
+          <p:nvPr/>
+        </p:nvSpPr>
+        <p:spPr>
+          <a:xfrm>
+            <a:off x="548640" y="411480"/>
+            <a:ext cx="11064240" cy="777240"/>
+          </a:xfrm>
+          <a:prstGeom prst="rect">
+            <a:avLst/>
+          </a:prstGeom>
+          <a:noFill/>
+        </p:spPr>
+        <p:txBody>
+          <a:bodyPr wrap="square">
+            <a:noAutofit/>
+          </a:bodyPr>
+          <a:lstStyle/>
+          <a:p>
+            <a:pPr>
+              <a:lnSpc>
+                <a:spcPts val="2200"/>
+              </a:lnSpc>
+            </a:pPr>
+            <a:r>
+              <a:rPr sz="2800" b="1">
+                <a:solidFill>
+                  <a:srgbClr val="1A1A2E"/>
+                </a:solidFill>
+                <a:latin typeface="Calibri"/>
+              </a:rPr>
+              <a:t>Pitfalls</a:t>
+            </a:r>
+          </a:p>
+        </p:txBody>
+      </p:sp>
+      <p:sp>
+        <p:nvSpPr>
+          <p:cNvPr id="3" name="TextBox 2"/>
+          <p:cNvSpPr txBox="1"/>
+          <p:nvPr/>
+        </p:nvSpPr>
+        <p:spPr>
+          <a:xfrm>
+            <a:off x="548640" y="1234440"/>
+            <a:ext cx="11064240" cy="4937760"/>
+          </a:xfrm>
+          <a:prstGeom prst="rect">
+            <a:avLst/>
+          </a:prstGeom>
+          <a:noFill/>
+        </p:spPr>
+        <p:txBody>
+          <a:bodyPr wrap="square">
+            <a:noAutofit/>
+          </a:bodyPr>
+          <a:lstStyle/>
+          <a:p>
+            <a:pPr lvl="0" marL="457200" indent="-228600">
+              <a:buFont typeface="Calibri"/>
+              <a:spcAft>
+                <a:spcPts val="1000"/>
+              </a:spcAft>
+              <a:buSzPct val="100000"/>
+              <a:buChar char="•"/>
+              <a:lnSpc>
+                <a:spcPts val="2200"/>
+              </a:lnSpc>
+            </a:pPr>
+            <a:r>
+              <a:rPr sz="2000" b="0">
+                <a:solidFill>
+                  <a:srgbClr val="333333"/>
+                </a:solidFill>
+                <a:latin typeface="Calibri"/>
+              </a:rPr>
+              <a:t>Putting pins inside modules</a:t>
+            </a:r>
+          </a:p>
+        </p:txBody>
+      </p:sp>
+      <p:sp>
+        <p:nvSpPr>
+          <p:cNvPr id="4" name="TextBox 3"/>
+          <p:cNvSpPr txBox="1"/>
+          <p:nvPr/>
+        </p:nvSpPr>
+        <p:spPr>
+          <a:xfrm>
+            <a:off x="548640" y="6355080"/>
+            <a:ext cx="11064240" cy="320040"/>
+          </a:xfrm>
+          <a:prstGeom prst="rect">
+            <a:avLst/>
+          </a:prstGeom>
+          <a:noFill/>
+        </p:spPr>
+        <p:txBody>
+          <a:bodyPr wrap="square">
+            <a:noAutofit/>
+          </a:bodyPr>
+          <a:lstStyle/>
+          <a:p>
+            <a:pPr algn="r">
+              <a:lnSpc>
+                <a:spcPts val="2200"/>
+              </a:lnSpc>
+              <a:defRPr sz="1000" b="0">
+                <a:solidFill>
+                  <a:srgbClr val="666666"/>
+                </a:solidFill>
+                <a:latin typeface="Calibri"/>
+              </a:defRPr>
+            </a:pPr>
+            <a:r>
+              <a:t>learn_floorplanning — 03 pin assignment</a:t>
+            </a:r>
+          </a:p>
+        </p:txBody>
+      </p:sp>
+    </p:spTree>
+  </p:cSld>
+  <p:clrMapOvr>
+    <a:masterClrMapping/>
+  </p:clrMapOvr>
+</p:sld>
+</file>
+
+<file path=ppt/slides/slide13.xml><?xml version="1.0" encoding="utf-8"?>
+<p:sld xmlns:a="http://schemas.openxmlformats.org/drawingml/2006/main" xmlns:p="http://schemas.openxmlformats.org/presentationml/2006/main" xmlns:r="http://schemas.openxmlformats.org/officeDocument/2006/relationships">
+  <p:cSld>
+    <p:spTree>
+      <p:nvGrpSpPr>
+        <p:cNvPr id="1" name=""/>
+        <p:cNvGrpSpPr/>
+        <p:nvPr/>
+      </p:nvGrpSpPr>
+      <p:grpSpPr/>
+      <p:sp>
+        <p:nvSpPr>
+          <p:cNvPr id="2" name="TextBox 1"/>
+          <p:cNvSpPr txBox="1"/>
+          <p:nvPr/>
+        </p:nvSpPr>
+        <p:spPr>
+          <a:xfrm>
+            <a:off x="548640" y="411480"/>
+            <a:ext cx="11064240" cy="777240"/>
+          </a:xfrm>
+          <a:prstGeom prst="rect">
+            <a:avLst/>
+          </a:prstGeom>
+          <a:noFill/>
+        </p:spPr>
+        <p:txBody>
+          <a:bodyPr wrap="square">
+            <a:noAutofit/>
+          </a:bodyPr>
+          <a:lstStyle/>
+          <a:p>
+            <a:pPr>
+              <a:lnSpc>
+                <a:spcPts val="2200"/>
+              </a:lnSpc>
+            </a:pPr>
+            <a:r>
+              <a:rPr sz="2800" b="1">
+                <a:solidFill>
+                  <a:srgbClr val="1A1A2E"/>
+                </a:solidFill>
+                <a:latin typeface="Calibri"/>
+              </a:rPr>
+              <a:t>Your turn</a:t>
+            </a:r>
+          </a:p>
+        </p:txBody>
+      </p:sp>
+      <p:sp>
+        <p:nvSpPr>
+          <p:cNvPr id="3" name="TextBox 2"/>
+          <p:cNvSpPr txBox="1"/>
+          <p:nvPr/>
+        </p:nvSpPr>
+        <p:spPr>
+          <a:xfrm>
+            <a:off x="548640" y="1234440"/>
+            <a:ext cx="11064240" cy="4937760"/>
+          </a:xfrm>
+          <a:prstGeom prst="rect">
+            <a:avLst/>
+          </a:prstGeom>
+          <a:noFill/>
+        </p:spPr>
+        <p:txBody>
+          <a:bodyPr wrap="square">
+            <a:noAutofit/>
+          </a:bodyPr>
+          <a:lstStyle/>
+          <a:p>
+            <a:pPr lvl="0" marL="457200" indent="-228600">
+              <a:buFont typeface="Calibri"/>
+              <a:spcAft>
+                <a:spcPts val="1000"/>
+              </a:spcAft>
+              <a:buSzPct val="100000"/>
+              <a:buChar char="•"/>
+              <a:lnSpc>
+                <a:spcPts val="2200"/>
+              </a:lnSpc>
+            </a:pPr>
+            <a:r>
+              <a:rPr sz="2000" b="0">
+                <a:solidFill>
+                  <a:srgbClr val="333333"/>
+                </a:solidFill>
+                <a:latin typeface="Calibri"/>
+              </a:rPr>
+              <a:t>Ship a valid four-side assignment</a:t>
+            </a:r>
+          </a:p>
+          <a:p>
+            <a:pPr lvl="0" marL="457200" indent="-228600">
+              <a:buFont typeface="Calibri"/>
+              <a:spcAft>
+                <a:spcPts val="1000"/>
+              </a:spcAft>
+              <a:buSzPct val="100000"/>
+              <a:buChar char="•"/>
+              <a:lnSpc>
+                <a:spcPts val="2200"/>
+              </a:lnSpc>
+            </a:pPr>
+            <a:r>
+              <a:rPr sz="2000" b="0">
+                <a:solidFill>
+                  <a:srgbClr val="333333"/>
+                </a:solidFill>
+                <a:latin typeface="Calibri"/>
+              </a:rPr>
+              <a:t>Offline compare is next; then the wrap points to learn_placement</a:t>
+            </a:r>
+          </a:p>
+        </p:txBody>
+      </p:sp>
+      <p:sp>
+        <p:nvSpPr>
+          <p:cNvPr id="4" name="TextBox 3"/>
+          <p:cNvSpPr txBox="1"/>
+          <p:nvPr/>
+        </p:nvSpPr>
+        <p:spPr>
+          <a:xfrm>
+            <a:off x="548640" y="6355080"/>
+            <a:ext cx="11064240" cy="320040"/>
+          </a:xfrm>
+          <a:prstGeom prst="rect">
+            <a:avLst/>
+          </a:prstGeom>
+          <a:noFill/>
+        </p:spPr>
+        <p:txBody>
+          <a:bodyPr wrap="square">
+            <a:noAutofit/>
+          </a:bodyPr>
+          <a:lstStyle/>
+          <a:p>
+            <a:pPr algn="r">
+              <a:lnSpc>
+                <a:spcPts val="2200"/>
+              </a:lnSpc>
+              <a:defRPr sz="1000" b="0">
+                <a:solidFill>
+                  <a:srgbClr val="666666"/>
+                </a:solidFill>
+                <a:latin typeface="Calibri"/>
+              </a:defRPr>
+            </a:pPr>
+            <a:r>
+              <a:t>learn_floorplanning — 03 pin assignment</a:t>
+            </a:r>
+          </a:p>
+        </p:txBody>
+      </p:sp>
+    </p:spTree>
+  </p:cSld>
+  <p:clrMapOvr>
+    <a:masterClrMapping/>
+  </p:clrMapOvr>
+</p:sld>
+</file>
+
 <file path=ppt/slides/slide2.xml><?xml version="1.0" encoding="utf-8"?>
+<p:sld xmlns:a="http://schemas.openxmlformats.org/drawingml/2006/main" xmlns:p="http://schemas.openxmlformats.org/presentationml/2006/main" xmlns:r="http://schemas.openxmlformats.org/officeDocument/2006/relationships">
+  <p:cSld>
+    <p:spTree>
+      <p:nvGrpSpPr>
+        <p:cNvPr id="1" name=""/>
+        <p:cNvGrpSpPr/>
+        <p:nvPr/>
+      </p:nvGrpSpPr>
+      <p:grpSpPr/>
+      <p:sp>
+        <p:nvSpPr>
+          <p:cNvPr id="2" name="TextBox 1"/>
+          <p:cNvSpPr txBox="1"/>
+          <p:nvPr/>
+        </p:nvSpPr>
+        <p:spPr>
+          <a:xfrm>
+            <a:off x="548640" y="411480"/>
+            <a:ext cx="11064240" cy="777240"/>
+          </a:xfrm>
+          <a:prstGeom prst="rect">
+            <a:avLst/>
+          </a:prstGeom>
+          <a:noFill/>
+        </p:spPr>
+        <p:txBody>
+          <a:bodyPr wrap="square">
+            <a:noAutofit/>
+          </a:bodyPr>
+          <a:lstStyle/>
+          <a:p>
+            <a:pPr>
+              <a:lnSpc>
+                <a:spcPts val="2200"/>
+              </a:lnSpc>
+            </a:pPr>
+            <a:r>
+              <a:rPr sz="2800" b="1">
+                <a:solidFill>
+                  <a:srgbClr val="1A1A2E"/>
+                </a:solidFill>
+                <a:latin typeface="Calibri"/>
+              </a:rPr>
+              <a:t>Pseudocode</a:t>
+            </a:r>
+          </a:p>
+        </p:txBody>
+      </p:sp>
+      <p:sp>
+        <p:nvSpPr>
+          <p:cNvPr id="3" name="TextBox 2"/>
+          <p:cNvSpPr txBox="1"/>
+          <p:nvPr/>
+        </p:nvSpPr>
+        <p:spPr>
+          <a:xfrm>
+            <a:off x="548640" y="1234440"/>
+            <a:ext cx="11064240" cy="4937760"/>
+          </a:xfrm>
+          <a:prstGeom prst="rect">
+            <a:avLst/>
+          </a:prstGeom>
+          <a:noFill/>
+        </p:spPr>
+        <p:txBody>
+          <a:bodyPr wrap="square">
+            <a:noAutofit/>
+          </a:bodyPr>
+          <a:lstStyle/>
+          <a:p>
+            <a:pPr lvl="0" marL="457200" indent="-228600">
+              <a:buFont typeface="Calibri"/>
+              <a:spcAft>
+                <a:spcPts val="1000"/>
+              </a:spcAft>
+              <a:buSzPct val="100000"/>
+              <a:buChar char="•"/>
+              <a:lnSpc>
+                <a:spcPts val="2200"/>
+              </a:lnSpc>
+            </a:pPr>
+            <a:r>
+              <a:rPr sz="2000" b="0">
+                <a:solidFill>
+                  <a:srgbClr val="333333"/>
+                </a:solidFill>
+                <a:latin typeface="Calibri"/>
+              </a:rPr>
+              <a:t>Pin assignment validates boundary I/O</a:t>
+            </a:r>
+          </a:p>
+          <a:p>
+            <a:pPr lvl="0" marL="457200" indent="-228600">
+              <a:buFont typeface="Calibri"/>
+              <a:spcAft>
+                <a:spcPts val="1000"/>
+              </a:spcAft>
+              <a:buSzPct val="100000"/>
+              <a:buChar char="•"/>
+              <a:lnSpc>
+                <a:spcPts val="2200"/>
+              </a:lnSpc>
+            </a:pPr>
+            <a:r>
+              <a:rPr sz="2000" b="0">
+                <a:solidFill>
+                  <a:srgbClr val="333333"/>
+                </a:solidFill>
+                <a:latin typeface="Calibri"/>
+              </a:rPr>
+              <a:t>Pseudocode checks side and offset ranges and requires all four outline sides to appear</a:t>
+            </a:r>
+          </a:p>
+          <a:p>
+            <a:pPr lvl="0" marL="457200" indent="-228600">
+              <a:buFont typeface="Calibri"/>
+              <a:spcAft>
+                <a:spcPts val="1000"/>
+              </a:spcAft>
+              <a:buSzPct val="100000"/>
+              <a:buChar char="•"/>
+              <a:lnSpc>
+                <a:spcPts val="2200"/>
+              </a:lnSpc>
+            </a:pPr>
+            <a:r>
+              <a:rPr sz="2000" b="0">
+                <a:solidFill>
+                  <a:srgbClr val="333333"/>
+                </a:solidFill>
+                <a:latin typeface="Calibri"/>
+              </a:rPr>
+              <a:t>Open this module's examples file and find the Pseudocode section</a:t>
+            </a:r>
+          </a:p>
+          <a:p>
+            <a:pPr lvl="0" marL="457200" indent="-228600">
+              <a:buFont typeface="Calibri"/>
+              <a:spcAft>
+                <a:spcPts val="1000"/>
+              </a:spcAft>
+              <a:buSzPct val="100000"/>
+              <a:buChar char="•"/>
+              <a:lnSpc>
+                <a:spcPts val="2200"/>
+              </a:lnSpc>
+            </a:pPr>
+            <a:r>
+              <a:rPr sz="2000" b="0">
+                <a:solidFill>
+                  <a:srgbClr val="333333"/>
+                </a:solidFill>
+                <a:latin typeface="Calibri"/>
+              </a:rPr>
+              <a:t>That written sketch is what you implement on the implement track and what the browser</a:t>
+            </a:r>
+          </a:p>
+        </p:txBody>
+      </p:sp>
+      <p:sp>
+        <p:nvSpPr>
+          <p:cNvPr id="4" name="TextBox 3"/>
+          <p:cNvSpPr txBox="1"/>
+          <p:nvPr/>
+        </p:nvSpPr>
+        <p:spPr>
+          <a:xfrm>
+            <a:off x="548640" y="6355080"/>
+            <a:ext cx="11064240" cy="320040"/>
+          </a:xfrm>
+          <a:prstGeom prst="rect">
+            <a:avLst/>
+          </a:prstGeom>
+          <a:noFill/>
+        </p:spPr>
+        <p:txBody>
+          <a:bodyPr wrap="square">
+            <a:noAutofit/>
+          </a:bodyPr>
+          <a:lstStyle/>
+          <a:p>
+            <a:pPr algn="r">
+              <a:lnSpc>
+                <a:spcPts val="2200"/>
+              </a:lnSpc>
+              <a:defRPr sz="1000" b="0">
+                <a:solidFill>
+                  <a:srgbClr val="666666"/>
+                </a:solidFill>
+                <a:latin typeface="Calibri"/>
+              </a:defRPr>
+            </a:pPr>
+            <a:r>
+              <a:t>learn_floorplanning — 03 pin assignment</a:t>
+            </a:r>
+          </a:p>
+        </p:txBody>
+      </p:sp>
+    </p:spTree>
+  </p:cSld>
+  <p:clrMapOvr>
+    <a:masterClrMapping/>
+  </p:clrMapOvr>
+</p:sld>
+</file>
+
+<file path=ppt/slides/slide3.xml><?xml version="1.0" encoding="utf-8"?>
+<p:sld xmlns:a="http://schemas.openxmlformats.org/drawingml/2006/main" xmlns:p="http://schemas.openxmlformats.org/presentationml/2006/main" xmlns:r="http://schemas.openxmlformats.org/officeDocument/2006/relationships">
+  <p:cSld>
+    <p:spTree>
+      <p:nvGrpSpPr>
+        <p:cNvPr id="1" name=""/>
+        <p:cNvGrpSpPr/>
+        <p:nvPr/>
+      </p:nvGrpSpPr>
+      <p:grpSpPr/>
+      <p:sp>
+        <p:nvSpPr>
+          <p:cNvPr id="2" name="TextBox 1"/>
+          <p:cNvSpPr txBox="1"/>
+          <p:nvPr/>
+        </p:nvSpPr>
+        <p:spPr>
+          <a:xfrm>
+            <a:off x="548640" y="411480"/>
+            <a:ext cx="11064240" cy="777240"/>
+          </a:xfrm>
+          <a:prstGeom prst="rect">
+            <a:avLst/>
+          </a:prstGeom>
+          <a:noFill/>
+        </p:spPr>
+        <p:txBody>
+          <a:bodyPr wrap="square">
+            <a:noAutofit/>
+          </a:bodyPr>
+          <a:lstStyle/>
+          <a:p>
+            <a:pPr>
+              <a:lnSpc>
+                <a:spcPts val="2200"/>
+              </a:lnSpc>
+            </a:pPr>
+            <a:r>
+              <a:rPr sz="2800" b="1">
+                <a:solidFill>
+                  <a:srgbClr val="1A1A2E"/>
+                </a:solidFill>
+                <a:latin typeface="Calibri"/>
+              </a:rPr>
+              <a:t>Algorithm sketch</a:t>
+            </a:r>
+          </a:p>
+        </p:txBody>
+      </p:sp>
+      <p:sp>
+        <p:nvSpPr>
+          <p:cNvPr id="3" name="TextBox 2"/>
+          <p:cNvSpPr txBox="1"/>
+          <p:nvPr/>
+        </p:nvSpPr>
+        <p:spPr>
+          <a:xfrm>
+            <a:off x="548640" y="1234440"/>
+            <a:ext cx="11064240" cy="4937760"/>
+          </a:xfrm>
+          <a:prstGeom prst="rect">
+            <a:avLst/>
+          </a:prstGeom>
+          <a:noFill/>
+        </p:spPr>
+        <p:txBody>
+          <a:bodyPr wrap="square">
+            <a:noAutofit/>
+          </a:bodyPr>
+          <a:lstStyle/>
+          <a:p>
+            <a:pPr lvl="0" marL="457200" indent="-228600">
+              <a:buFont typeface="Calibri"/>
+              <a:spcAft>
+                <a:spcPts val="1000"/>
+              </a:spcAft>
+              <a:buSzPct val="100000"/>
+              <a:buChar char="•"/>
+              <a:lnSpc>
+                <a:spcPts val="2200"/>
+              </a:lnSpc>
+            </a:pPr>
+            <a:r>
+              <a:rPr sz="2000" b="0">
+                <a:solidFill>
+                  <a:srgbClr val="333333"/>
+                </a:solidFill>
+                <a:latin typeface="Calibri"/>
+              </a:rPr>
+              <a:t>Golden pins cover left, bottom, right, and top and return valid true</a:t>
+            </a:r>
+          </a:p>
+          <a:p>
+            <a:pPr lvl="0" marL="457200" indent="-228600">
+              <a:buFont typeface="Calibri"/>
+              <a:spcAft>
+                <a:spcPts val="1000"/>
+              </a:spcAft>
+              <a:buSzPct val="100000"/>
+              <a:buChar char="•"/>
+              <a:lnSpc>
+                <a:spcPts val="2200"/>
+              </a:lnSpc>
+            </a:pPr>
+            <a:r>
+              <a:rPr sz="2000" b="0">
+                <a:solidFill>
+                  <a:srgbClr val="333333"/>
+                </a:solidFill>
+                <a:latin typeface="Calibri"/>
+              </a:rPr>
+              <a:t>An empty list fails validity</a:t>
+            </a:r>
+          </a:p>
+        </p:txBody>
+      </p:sp>
+      <p:sp>
+        <p:nvSpPr>
+          <p:cNvPr id="4" name="TextBox 3"/>
+          <p:cNvSpPr txBox="1"/>
+          <p:nvPr/>
+        </p:nvSpPr>
+        <p:spPr>
+          <a:xfrm>
+            <a:off x="548640" y="6355080"/>
+            <a:ext cx="11064240" cy="320040"/>
+          </a:xfrm>
+          <a:prstGeom prst="rect">
+            <a:avLst/>
+          </a:prstGeom>
+          <a:noFill/>
+        </p:spPr>
+        <p:txBody>
+          <a:bodyPr wrap="square">
+            <a:noAutofit/>
+          </a:bodyPr>
+          <a:lstStyle/>
+          <a:p>
+            <a:pPr algn="r">
+              <a:lnSpc>
+                <a:spcPts val="2200"/>
+              </a:lnSpc>
+              <a:defRPr sz="1000" b="0">
+                <a:solidFill>
+                  <a:srgbClr val="666666"/>
+                </a:solidFill>
+                <a:latin typeface="Calibri"/>
+              </a:defRPr>
+            </a:pPr>
+            <a:r>
+              <a:t>learn_floorplanning — 03 pin assignment</a:t>
+            </a:r>
+          </a:p>
+        </p:txBody>
+      </p:sp>
+    </p:spTree>
+  </p:cSld>
+  <p:clrMapOvr>
+    <a:masterClrMapping/>
+  </p:clrMapOvr>
+</p:sld>
+</file>
+
+<file path=ppt/slides/slide4.xml><?xml version="1.0" encoding="utf-8"?>
+<p:sld xmlns:a="http://schemas.openxmlformats.org/drawingml/2006/main" xmlns:p="http://schemas.openxmlformats.org/presentationml/2006/main" xmlns:r="http://schemas.openxmlformats.org/officeDocument/2006/relationships">
+  <p:cSld>
+    <p:spTree>
+      <p:nvGrpSpPr>
+        <p:cNvPr id="1" name=""/>
+        <p:cNvGrpSpPr/>
+        <p:nvPr/>
+      </p:nvGrpSpPr>
+      <p:grpSpPr/>
+      <p:sp>
+        <p:nvSpPr>
+          <p:cNvPr id="2" name="TextBox 1"/>
+          <p:cNvSpPr txBox="1"/>
+          <p:nvPr/>
+        </p:nvSpPr>
+        <p:spPr>
+          <a:xfrm>
+            <a:off x="548640" y="411480"/>
+            <a:ext cx="11064240" cy="777240"/>
+          </a:xfrm>
+          <a:prstGeom prst="rect">
+            <a:avLst/>
+          </a:prstGeom>
+          <a:noFill/>
+        </p:spPr>
+        <p:txBody>
+          <a:bodyPr wrap="square">
+            <a:noAutofit/>
+          </a:bodyPr>
+          <a:lstStyle/>
+          <a:p>
+            <a:pPr>
+              <a:lnSpc>
+                <a:spcPts val="2200"/>
+              </a:lnSpc>
+            </a:pPr>
+            <a:r>
+              <a:rPr sz="2800" b="1">
+                <a:solidFill>
+                  <a:srgbClr val="1A1A2E"/>
+                </a:solidFill>
+                <a:latin typeface="Calibri"/>
+              </a:rPr>
+              <a:t>Algorithm sketch — try these</a:t>
+            </a:r>
+          </a:p>
+        </p:txBody>
+      </p:sp>
+      <p:sp>
+        <p:nvSpPr>
+          <p:cNvPr id="3" name="TextBox 2"/>
+          <p:cNvSpPr txBox="1"/>
+          <p:nvPr/>
+        </p:nvSpPr>
+        <p:spPr>
+          <a:xfrm>
+            <a:off x="548640" y="1143000"/>
+            <a:ext cx="11064240" cy="5029200"/>
+          </a:xfrm>
+          <a:prstGeom prst="rect">
+            <a:avLst/>
+          </a:prstGeom>
+          <a:solidFill>
+            <a:srgbClr val="F4F4F4"/>
+          </a:solidFill>
+        </p:spPr>
+        <p:txBody>
+          <a:bodyPr wrap="square">
+            <a:noAutofit/>
+          </a:bodyPr>
+          <a:lstStyle/>
+          <a:p>
+            <a:pPr>
+              <a:lnSpc>
+                <a:spcPts val="2200"/>
+              </a:lnSpc>
+              <a:spcAft>
+                <a:spcPts val="400"/>
+              </a:spcAft>
+            </a:pPr>
+            <a:r>
+              <a:rPr sz="2000" b="0">
+                <a:solidFill>
+                  <a:srgbClr val="333333"/>
+                </a:solidFill>
+                <a:latin typeface="Consolas"/>
+              </a:rPr>
+              <a:t>INPUT: outline, pin list {side, offset}</a:t>
+            </a:r>
+          </a:p>
+          <a:p>
+            <a:pPr>
+              <a:lnSpc>
+                <a:spcPts val="2200"/>
+              </a:lnSpc>
+              <a:spcAft>
+                <a:spcPts val="400"/>
+              </a:spcAft>
+            </a:pPr>
+            <a:r>
+              <a:rPr sz="2000" b="0">
+                <a:solidFill>
+                  <a:srgbClr val="333333"/>
+                </a:solidFill>
+                <a:latin typeface="Consolas"/>
+              </a:rPr>
+              <a:t>OUTPUT: pinsValid?</a:t>
+            </a:r>
+          </a:p>
+          <a:p>
+            <a:pPr>
+              <a:lnSpc>
+                <a:spcPts val="2200"/>
+              </a:lnSpc>
+              <a:spcAft>
+                <a:spcPts val="400"/>
+              </a:spcAft>
+            </a:pPr>
+            <a:r>
+              <a:rPr sz="2000" b="0">
+                <a:solidFill>
+                  <a:srgbClr val="333333"/>
+                </a:solidFill>
+                <a:latin typeface="Consolas"/>
+              </a:rPr>
+              <a:t>each pin on left|right|top|bottom edge</a:t>
+            </a:r>
+          </a:p>
+          <a:p>
+            <a:pPr>
+              <a:lnSpc>
+                <a:spcPts val="2200"/>
+              </a:lnSpc>
+              <a:spcAft>
+                <a:spcPts val="400"/>
+              </a:spcAft>
+            </a:pPr>
+            <a:r>
+              <a:rPr sz="2000" b="0">
+                <a:solidFill>
+                  <a:srgbClr val="333333"/>
+                </a:solidFill>
+                <a:latin typeface="Consolas"/>
+              </a:rPr>
+              <a:t>offset in range for that side</a:t>
+            </a:r>
+          </a:p>
+          <a:p>
+            <a:pPr>
+              <a:lnSpc>
+                <a:spcPts val="2200"/>
+              </a:lnSpc>
+              <a:spcAft>
+                <a:spcPts val="400"/>
+              </a:spcAft>
+            </a:pPr>
+            <a:r>
+              <a:rPr sz="2000" b="0">
+                <a:solidFill>
+                  <a:srgbClr val="333333"/>
+                </a:solidFill>
+                <a:latin typeface="Consolas"/>
+              </a:rPr>
+              <a:t>require all four sides represented</a:t>
+            </a:r>
+          </a:p>
+          <a:p>
+            <a:pPr>
+              <a:lnSpc>
+                <a:spcPts val="2200"/>
+              </a:lnSpc>
+              <a:spcAft>
+                <a:spcPts val="400"/>
+              </a:spcAft>
+            </a:pPr>
+            <a:r>
+              <a:rPr sz="2000" b="0">
+                <a:solidFill>
+                  <a:srgbClr val="333333"/>
+                </a:solidFill>
+                <a:latin typeface="Consolas"/>
+              </a:rPr>
+              <a:t>GOLDEN 4 pins (one/side) → valid true</a:t>
+            </a:r>
+          </a:p>
+          <a:p>
+            <a:pPr>
+              <a:lnSpc>
+                <a:spcPts val="2200"/>
+              </a:lnSpc>
+              <a:spcAft>
+                <a:spcPts val="400"/>
+              </a:spcAft>
+            </a:pPr>
+            <a:r>
+              <a:rPr sz="2000" b="0">
+                <a:solidFill>
+                  <a:srgbClr val="333333"/>
+                </a:solidFill>
+                <a:latin typeface="Consolas"/>
+              </a:rPr>
+              <a:t>empty list → valid false</a:t>
+            </a:r>
+          </a:p>
+        </p:txBody>
+      </p:sp>
+      <p:sp>
+        <p:nvSpPr>
+          <p:cNvPr id="4" name="TextBox 3"/>
+          <p:cNvSpPr txBox="1"/>
+          <p:nvPr/>
+        </p:nvSpPr>
+        <p:spPr>
+          <a:xfrm>
+            <a:off x="548640" y="6355080"/>
+            <a:ext cx="11064240" cy="320040"/>
+          </a:xfrm>
+          <a:prstGeom prst="rect">
+            <a:avLst/>
+          </a:prstGeom>
+          <a:noFill/>
+        </p:spPr>
+        <p:txBody>
+          <a:bodyPr wrap="square">
+            <a:noAutofit/>
+          </a:bodyPr>
+          <a:lstStyle/>
+          <a:p>
+            <a:pPr algn="r">
+              <a:lnSpc>
+                <a:spcPts val="2200"/>
+              </a:lnSpc>
+              <a:defRPr sz="1000" b="0">
+                <a:solidFill>
+                  <a:srgbClr val="666666"/>
+                </a:solidFill>
+                <a:latin typeface="Calibri"/>
+              </a:defRPr>
+            </a:pPr>
+            <a:r>
+              <a:t>learn_floorplanning — 03 pin assignment</a:t>
+            </a:r>
+          </a:p>
+        </p:txBody>
+      </p:sp>
+    </p:spTree>
+  </p:cSld>
+  <p:clrMapOvr>
+    <a:masterClrMapping/>
+  </p:clrMapOvr>
+</p:sld>
+</file>
+
+<file path=ppt/slides/slide5.xml><?xml version="1.0" encoding="utf-8"?>
 <p:sld xmlns:a="http://schemas.openxmlformats.org/drawingml/2006/main" xmlns:p="http://schemas.openxmlformats.org/presentationml/2006/main" xmlns:r="http://schemas.openxmlformats.org/officeDocument/2006/relationships">
   <p:cSld>
     <p:spTree>
@@ -4589,7 +5839,7 @@
 </p:sld>
 </file>
 
-<file path=ppt/slides/slide3.xml><?xml version="1.0" encoding="utf-8"?>
+<file path=ppt/slides/slide6.xml><?xml version="1.0" encoding="utf-8"?>
 <p:sld xmlns:a="http://schemas.openxmlformats.org/drawingml/2006/main" xmlns:p="http://schemas.openxmlformats.org/presentationml/2006/main" xmlns:r="http://schemas.openxmlformats.org/officeDocument/2006/relationships">
   <p:cSld>
     <p:spTree>
@@ -4748,7 +5998,7 @@
 </p:sld>
 </file>
 
-<file path=ppt/slides/slide4.xml><?xml version="1.0" encoding="utf-8"?>
+<file path=ppt/slides/slide7.xml><?xml version="1.0" encoding="utf-8"?>
 <p:sld xmlns:a="http://schemas.openxmlformats.org/drawingml/2006/main" xmlns:p="http://schemas.openxmlformats.org/presentationml/2006/main" xmlns:r="http://schemas.openxmlformats.org/officeDocument/2006/relationships">
   <p:cSld>
     <p:spTree>
@@ -4907,7 +6157,7 @@
 </p:sld>
 </file>
 
-<file path=ppt/slides/slide5.xml><?xml version="1.0" encoding="utf-8"?>
+<file path=ppt/slides/slide8.xml><?xml version="1.0" encoding="utf-8"?>
 <p:sld xmlns:a="http://schemas.openxmlformats.org/drawingml/2006/main" xmlns:p="http://schemas.openxmlformats.org/presentationml/2006/main" xmlns:r="http://schemas.openxmlformats.org/officeDocument/2006/relationships">
   <p:cSld>
     <p:spTree>
@@ -5066,7 +6316,7 @@
 </p:sld>
 </file>
 
-<file path=ppt/slides/slide6.xml><?xml version="1.0" encoding="utf-8"?>
+<file path=ppt/slides/slide9.xml><?xml version="1.0" encoding="utf-8"?>
 <p:sld xmlns:a="http://schemas.openxmlformats.org/drawingml/2006/main" xmlns:p="http://schemas.openxmlformats.org/presentationml/2006/main" xmlns:r="http://schemas.openxmlformats.org/officeDocument/2006/relationships">
   <p:cSld>
     <p:spTree>
@@ -5181,495 +6431,6 @@
       <p:sp>
         <p:nvSpPr>
           <p:cNvPr id="5" name="TextBox 4"/>
-          <p:cNvSpPr txBox="1"/>
-          <p:nvPr/>
-        </p:nvSpPr>
-        <p:spPr>
-          <a:xfrm>
-            <a:off x="548640" y="6355080"/>
-            <a:ext cx="11064240" cy="320040"/>
-          </a:xfrm>
-          <a:prstGeom prst="rect">
-            <a:avLst/>
-          </a:prstGeom>
-          <a:noFill/>
-        </p:spPr>
-        <p:txBody>
-          <a:bodyPr wrap="square">
-            <a:noAutofit/>
-          </a:bodyPr>
-          <a:lstStyle/>
-          <a:p>
-            <a:pPr algn="r">
-              <a:lnSpc>
-                <a:spcPts val="2200"/>
-              </a:lnSpc>
-              <a:defRPr sz="1000" b="0">
-                <a:solidFill>
-                  <a:srgbClr val="666666"/>
-                </a:solidFill>
-                <a:latin typeface="Calibri"/>
-              </a:defRPr>
-            </a:pPr>
-            <a:r>
-              <a:t>learn_floorplanning — 03 pin assignment</a:t>
-            </a:r>
-          </a:p>
-        </p:txBody>
-      </p:sp>
-    </p:spTree>
-  </p:cSld>
-  <p:clrMapOvr>
-    <a:masterClrMapping/>
-  </p:clrMapOvr>
-</p:sld>
-</file>
-
-<file path=ppt/slides/slide7.xml><?xml version="1.0" encoding="utf-8"?>
-<p:sld xmlns:a="http://schemas.openxmlformats.org/drawingml/2006/main" xmlns:p="http://schemas.openxmlformats.org/presentationml/2006/main" xmlns:r="http://schemas.openxmlformats.org/officeDocument/2006/relationships">
-  <p:cSld>
-    <p:spTree>
-      <p:nvGrpSpPr>
-        <p:cNvPr id="1" name=""/>
-        <p:cNvGrpSpPr/>
-        <p:nvPr/>
-      </p:nvGrpSpPr>
-      <p:grpSpPr/>
-      <p:sp>
-        <p:nvSpPr>
-          <p:cNvPr id="2" name="TextBox 1"/>
-          <p:cNvSpPr txBox="1"/>
-          <p:nvPr/>
-        </p:nvSpPr>
-        <p:spPr>
-          <a:xfrm>
-            <a:off x="548640" y="411480"/>
-            <a:ext cx="11064240" cy="777240"/>
-          </a:xfrm>
-          <a:prstGeom prst="rect">
-            <a:avLst/>
-          </a:prstGeom>
-          <a:noFill/>
-        </p:spPr>
-        <p:txBody>
-          <a:bodyPr wrap="square">
-            <a:noAutofit/>
-          </a:bodyPr>
-          <a:lstStyle/>
-          <a:p>
-            <a:pPr>
-              <a:lnSpc>
-                <a:spcPts val="2200"/>
-              </a:lnSpc>
-            </a:pPr>
-            <a:r>
-              <a:rPr sz="2800" b="1">
-                <a:solidFill>
-                  <a:srgbClr val="1A1A2E"/>
-                </a:solidFill>
-                <a:latin typeface="Calibri"/>
-              </a:rPr>
-              <a:t>Browser lab track</a:t>
-            </a:r>
-          </a:p>
-        </p:txBody>
-      </p:sp>
-      <p:sp>
-        <p:nvSpPr>
-          <p:cNvPr id="3" name="TextBox 2"/>
-          <p:cNvSpPr txBox="1"/>
-          <p:nvPr/>
-        </p:nvSpPr>
-        <p:spPr>
-          <a:xfrm>
-            <a:off x="548640" y="1234440"/>
-            <a:ext cx="11064240" cy="4937760"/>
-          </a:xfrm>
-          <a:prstGeom prst="rect">
-            <a:avLst/>
-          </a:prstGeom>
-          <a:noFill/>
-        </p:spPr>
-        <p:txBody>
-          <a:bodyPr wrap="square">
-            <a:noAutofit/>
-          </a:bodyPr>
-          <a:lstStyle/>
-          <a:p>
-            <a:pPr lvl="0" marL="457200" indent="-228600">
-              <a:buFont typeface="Calibri"/>
-              <a:spcAft>
-                <a:spcPts val="1000"/>
-              </a:spcAft>
-              <a:buSzPct val="100000"/>
-              <a:buChar char="•"/>
-              <a:lnSpc>
-                <a:spcPts val="2200"/>
-              </a:lnSpc>
-            </a:pPr>
-            <a:r>
-              <a:rPr sz="2000" b="0">
-                <a:solidFill>
-                  <a:srgbClr val="333333"/>
-                </a:solidFill>
-                <a:latin typeface="Calibri"/>
-              </a:rPr>
-              <a:t>Open pin-assignment</a:t>
-            </a:r>
-          </a:p>
-          <a:p>
-            <a:pPr lvl="0" marL="457200" indent="-228600">
-              <a:buFont typeface="Calibri"/>
-              <a:spcAft>
-                <a:spcPts val="1000"/>
-              </a:spcAft>
-              <a:buSzPct val="100000"/>
-              <a:buChar char="•"/>
-              <a:lnSpc>
-                <a:spcPts val="2200"/>
-              </a:lnSpc>
-            </a:pPr>
-            <a:r>
-              <a:rPr sz="2000" b="0">
-                <a:solidFill>
-                  <a:srgbClr val="333333"/>
-                </a:solidFill>
-                <a:latin typeface="Calibri"/>
-              </a:rPr>
-              <a:t>Assign golden pins, confirm four sides and valid true</a:t>
-            </a:r>
-          </a:p>
-          <a:p>
-            <a:pPr lvl="0" marL="457200" indent="-228600">
-              <a:buFont typeface="Calibri"/>
-              <a:spcAft>
-                <a:spcPts val="1000"/>
-              </a:spcAft>
-              <a:buSzPct val="100000"/>
-              <a:buChar char="•"/>
-              <a:lnSpc>
-                <a:spcPts val="2200"/>
-              </a:lnSpc>
-            </a:pPr>
-            <a:r>
-              <a:rPr sz="2000" b="0">
-                <a:solidFill>
-                  <a:srgbClr val="333333"/>
-                </a:solidFill>
-                <a:latin typeface="Calibri"/>
-              </a:rPr>
-              <a:t>Clear pins and watch validity fail</a:t>
-            </a:r>
-          </a:p>
-        </p:txBody>
-      </p:sp>
-      <p:sp>
-        <p:nvSpPr>
-          <p:cNvPr id="4" name="TextBox 3"/>
-          <p:cNvSpPr txBox="1"/>
-          <p:nvPr/>
-        </p:nvSpPr>
-        <p:spPr>
-          <a:xfrm>
-            <a:off x="548640" y="6355080"/>
-            <a:ext cx="11064240" cy="320040"/>
-          </a:xfrm>
-          <a:prstGeom prst="rect">
-            <a:avLst/>
-          </a:prstGeom>
-          <a:noFill/>
-        </p:spPr>
-        <p:txBody>
-          <a:bodyPr wrap="square">
-            <a:noAutofit/>
-          </a:bodyPr>
-          <a:lstStyle/>
-          <a:p>
-            <a:pPr algn="r">
-              <a:lnSpc>
-                <a:spcPts val="2200"/>
-              </a:lnSpc>
-              <a:defRPr sz="1000" b="0">
-                <a:solidFill>
-                  <a:srgbClr val="666666"/>
-                </a:solidFill>
-                <a:latin typeface="Calibri"/>
-              </a:defRPr>
-            </a:pPr>
-            <a:r>
-              <a:t>learn_floorplanning — 03 pin assignment</a:t>
-            </a:r>
-          </a:p>
-        </p:txBody>
-      </p:sp>
-    </p:spTree>
-  </p:cSld>
-  <p:clrMapOvr>
-    <a:masterClrMapping/>
-  </p:clrMapOvr>
-</p:sld>
-</file>
-
-<file path=ppt/slides/slide8.xml><?xml version="1.0" encoding="utf-8"?>
-<p:sld xmlns:a="http://schemas.openxmlformats.org/drawingml/2006/main" xmlns:p="http://schemas.openxmlformats.org/presentationml/2006/main" xmlns:r="http://schemas.openxmlformats.org/officeDocument/2006/relationships">
-  <p:cSld>
-    <p:spTree>
-      <p:nvGrpSpPr>
-        <p:cNvPr id="1" name=""/>
-        <p:cNvGrpSpPr/>
-        <p:nvPr/>
-      </p:nvGrpSpPr>
-      <p:grpSpPr/>
-      <p:sp>
-        <p:nvSpPr>
-          <p:cNvPr id="2" name="TextBox 1"/>
-          <p:cNvSpPr txBox="1"/>
-          <p:nvPr/>
-        </p:nvSpPr>
-        <p:spPr>
-          <a:xfrm>
-            <a:off x="548640" y="411480"/>
-            <a:ext cx="11064240" cy="777240"/>
-          </a:xfrm>
-          <a:prstGeom prst="rect">
-            <a:avLst/>
-          </a:prstGeom>
-          <a:noFill/>
-        </p:spPr>
-        <p:txBody>
-          <a:bodyPr wrap="square">
-            <a:noAutofit/>
-          </a:bodyPr>
-          <a:lstStyle/>
-          <a:p>
-            <a:pPr>
-              <a:lnSpc>
-                <a:spcPts val="2200"/>
-              </a:lnSpc>
-            </a:pPr>
-            <a:r>
-              <a:rPr sz="2800" b="1">
-                <a:solidFill>
-                  <a:srgbClr val="1A1A2E"/>
-                </a:solidFill>
-                <a:latin typeface="Calibri"/>
-              </a:rPr>
-              <a:t>Implement track</a:t>
-            </a:r>
-          </a:p>
-        </p:txBody>
-      </p:sp>
-      <p:sp>
-        <p:nvSpPr>
-          <p:cNvPr id="3" name="TextBox 2"/>
-          <p:cNvSpPr txBox="1"/>
-          <p:nvPr/>
-        </p:nvSpPr>
-        <p:spPr>
-          <a:xfrm>
-            <a:off x="548640" y="1234440"/>
-            <a:ext cx="11064240" cy="4937760"/>
-          </a:xfrm>
-          <a:prstGeom prst="rect">
-            <a:avLst/>
-          </a:prstGeom>
-          <a:noFill/>
-        </p:spPr>
-        <p:txBody>
-          <a:bodyPr wrap="square">
-            <a:noAutofit/>
-          </a:bodyPr>
-          <a:lstStyle/>
-          <a:p>
-            <a:pPr lvl="0" marL="457200" indent="-228600">
-              <a:buFont typeface="Calibri"/>
-              <a:spcAft>
-                <a:spcPts val="1000"/>
-              </a:spcAft>
-              <a:buSzPct val="100000"/>
-              <a:buChar char="•"/>
-              <a:lnSpc>
-                <a:spcPts val="2200"/>
-              </a:lnSpc>
-            </a:pPr>
-            <a:r>
-              <a:rPr sz="2000" b="0">
-                <a:solidFill>
-                  <a:srgbClr val="333333"/>
-                </a:solidFill>
-                <a:latin typeface="Calibri"/>
-              </a:rPr>
-              <a:t>Implement pinsValid requiring all four sides and in-range offsets</a:t>
-            </a:r>
-          </a:p>
-          <a:p>
-            <a:pPr lvl="0" marL="457200" indent="-228600">
-              <a:buFont typeface="Calibri"/>
-              <a:spcAft>
-                <a:spcPts val="1000"/>
-              </a:spcAft>
-              <a:buSzPct val="100000"/>
-              <a:buChar char="•"/>
-              <a:lnSpc>
-                <a:spcPts val="2200"/>
-              </a:lnSpc>
-            </a:pPr>
-            <a:r>
-              <a:rPr sz="2000" b="0">
-                <a:solidFill>
-                  <a:srgbClr val="333333"/>
-                </a:solidFill>
-                <a:latin typeface="Calibri"/>
-              </a:rPr>
-              <a:t>Assert golden pins pass and the empty list fails</a:t>
-            </a:r>
-          </a:p>
-        </p:txBody>
-      </p:sp>
-      <p:sp>
-        <p:nvSpPr>
-          <p:cNvPr id="4" name="TextBox 3"/>
-          <p:cNvSpPr txBox="1"/>
-          <p:nvPr/>
-        </p:nvSpPr>
-        <p:spPr>
-          <a:xfrm>
-            <a:off x="548640" y="6355080"/>
-            <a:ext cx="11064240" cy="320040"/>
-          </a:xfrm>
-          <a:prstGeom prst="rect">
-            <a:avLst/>
-          </a:prstGeom>
-          <a:noFill/>
-        </p:spPr>
-        <p:txBody>
-          <a:bodyPr wrap="square">
-            <a:noAutofit/>
-          </a:bodyPr>
-          <a:lstStyle/>
-          <a:p>
-            <a:pPr algn="r">
-              <a:lnSpc>
-                <a:spcPts val="2200"/>
-              </a:lnSpc>
-              <a:defRPr sz="1000" b="0">
-                <a:solidFill>
-                  <a:srgbClr val="666666"/>
-                </a:solidFill>
-                <a:latin typeface="Calibri"/>
-              </a:defRPr>
-            </a:pPr>
-            <a:r>
-              <a:t>learn_floorplanning — 03 pin assignment</a:t>
-            </a:r>
-          </a:p>
-        </p:txBody>
-      </p:sp>
-    </p:spTree>
-  </p:cSld>
-  <p:clrMapOvr>
-    <a:masterClrMapping/>
-  </p:clrMapOvr>
-</p:sld>
-</file>
-
-<file path=ppt/slides/slide9.xml><?xml version="1.0" encoding="utf-8"?>
-<p:sld xmlns:a="http://schemas.openxmlformats.org/drawingml/2006/main" xmlns:p="http://schemas.openxmlformats.org/presentationml/2006/main" xmlns:r="http://schemas.openxmlformats.org/officeDocument/2006/relationships">
-  <p:cSld>
-    <p:spTree>
-      <p:nvGrpSpPr>
-        <p:cNvPr id="1" name=""/>
-        <p:cNvGrpSpPr/>
-        <p:nvPr/>
-      </p:nvGrpSpPr>
-      <p:grpSpPr/>
-      <p:sp>
-        <p:nvSpPr>
-          <p:cNvPr id="2" name="TextBox 1"/>
-          <p:cNvSpPr txBox="1"/>
-          <p:nvPr/>
-        </p:nvSpPr>
-        <p:spPr>
-          <a:xfrm>
-            <a:off x="548640" y="411480"/>
-            <a:ext cx="11064240" cy="777240"/>
-          </a:xfrm>
-          <a:prstGeom prst="rect">
-            <a:avLst/>
-          </a:prstGeom>
-          <a:noFill/>
-        </p:spPr>
-        <p:txBody>
-          <a:bodyPr wrap="square">
-            <a:noAutofit/>
-          </a:bodyPr>
-          <a:lstStyle/>
-          <a:p>
-            <a:pPr>
-              <a:lnSpc>
-                <a:spcPts val="2200"/>
-              </a:lnSpc>
-            </a:pPr>
-            <a:r>
-              <a:rPr sz="2800" b="1">
-                <a:solidFill>
-                  <a:srgbClr val="1A1A2E"/>
-                </a:solidFill>
-                <a:latin typeface="Calibri"/>
-              </a:rPr>
-              <a:t>Pitfalls</a:t>
-            </a:r>
-          </a:p>
-        </p:txBody>
-      </p:sp>
-      <p:sp>
-        <p:nvSpPr>
-          <p:cNvPr id="3" name="TextBox 2"/>
-          <p:cNvSpPr txBox="1"/>
-          <p:nvPr/>
-        </p:nvSpPr>
-        <p:spPr>
-          <a:xfrm>
-            <a:off x="548640" y="1234440"/>
-            <a:ext cx="11064240" cy="4937760"/>
-          </a:xfrm>
-          <a:prstGeom prst="rect">
-            <a:avLst/>
-          </a:prstGeom>
-          <a:noFill/>
-        </p:spPr>
-        <p:txBody>
-          <a:bodyPr wrap="square">
-            <a:noAutofit/>
-          </a:bodyPr>
-          <a:lstStyle/>
-          <a:p>
-            <a:pPr lvl="0" marL="457200" indent="-228600">
-              <a:buFont typeface="Calibri"/>
-              <a:spcAft>
-                <a:spcPts val="1000"/>
-              </a:spcAft>
-              <a:buSzPct val="100000"/>
-              <a:buChar char="•"/>
-              <a:lnSpc>
-                <a:spcPts val="2200"/>
-              </a:lnSpc>
-            </a:pPr>
-            <a:r>
-              <a:rPr sz="2000" b="0">
-                <a:solidFill>
-                  <a:srgbClr val="333333"/>
-                </a:solidFill>
-                <a:latin typeface="Calibri"/>
-              </a:rPr>
-              <a:t>Putting pins inside modules</a:t>
-            </a:r>
-          </a:p>
-        </p:txBody>
-      </p:sp>
-      <p:sp>
-        <p:nvSpPr>
-          <p:cNvPr id="4" name="TextBox 3"/>
           <p:cNvSpPr txBox="1"/>
           <p:nvPr/>
         </p:nvSpPr>
